--- a/it/slides/07-Architettura_dei_Calcolatori-Verm1_Parte_1.pptx
+++ b/it/slides/07-Architettura_dei_Calcolatori-Verm1_Parte_1.pptx
@@ -119,31 +119,31 @@
   <p:extLst>
     <p:ext uri="{521415D9-36F7-43E2-AB2F-B90AF26B5E84}">
       <p14:sectionLst xmlns:p14="http://schemas.microsoft.com/office/powerpoint/2010/main">
-        <p14:section name="Apertura" id="{7bc54c10-9290-6999-e5ac-04509df4b65e}">
+        <p14:section name="Apertura" id="{02efde15-7594-321d-c5fa-e17c4cd47fac}">
           <p14:sldIdLst>
             <p14:sldId id="256"/>
             <p14:sldId id="257"/>
           </p14:sldIdLst>
         </p14:section>
-        <p14:section name="Il progetto" id="{b141af04-2b39-b71d-dddb-31ff245ac8e3}">
+        <p14:section name="Il progetto" id="{df18654b-25b3-c2c7-0995-0daadeb732fb}">
           <p14:sldIdLst>
             <p14:sldId id="258"/>
             <p14:sldId id="259"/>
             <p14:sldId id="260"/>
           </p14:sldIdLst>
         </p14:section>
-        <p14:section name="Passo 2: una griglia e una testa" id="{53342515-1024-b947-3553-296f7e2c9a54}">
+        <p14:section name="Passo 2: una griglia e una testa" id="{c0880f2d-adf0-a6e2-9e7f-c0796162325e}">
           <p14:sldIdLst>
             <p14:sldId id="261"/>
           </p14:sldIdLst>
         </p14:section>
-        <p14:section name="Passo 3: il movimento" id="{6868df7e-18cb-378f-e5e5-4c1b0485054a}">
+        <p14:section name="Passo 3: il movimento" id="{dcee2378-ce12-0410-6001-d4b4f4a16f56}">
           <p14:sldIdLst>
             <p14:sldId id="262"/>
             <p14:sldId id="263"/>
           </p14:sldIdLst>
         </p14:section>
-        <p14:section name="Passo 4: guardare dentro con PRG32-QT" id="{8b131e9e-8184-aae2-80bc-c97b361e2b43}">
+        <p14:section name="Passo 4: guardare dentro con PRG32-QT" id="{773466ce-5aa8-e5ee-d555-89c51637beba}">
           <p14:sldIdLst>
             <p14:sldId id="264"/>
             <p14:sldId id="265"/>
@@ -2694,7 +2694,63 @@
       </p:sp>
       <p:sp>
         <p:nvSpPr>
-          <p:cNvPr id="13" name="Shape 11"/>
+          <p:cNvPr id="13" name="Text 11"/>
+          <p:cNvSpPr txBox="1"/>
+          <p:nvPr/>
+        </p:nvSpPr>
+        <p:spPr>
+          <a:xfrm>
+            <a:off x="4693615" y="566928"/>
+            <a:ext cx="6949440" cy="640080"/>
+          </a:xfrm>
+          <a:prstGeom prst="rect">
+            <a:avLst/>
+          </a:prstGeom>
+          <a:noFill/>
+          <a:ln/>
+        </p:spPr>
+        <p:txBody>
+          <a:bodyPr wrap="square" lIns="0" tIns="0" rIns="0" bIns="0" rtlCol="0" anchor="t"/>
+          <a:lstStyle/>
+          <a:p>
+            <a:pPr algn="r" indent="0" marL="0">
+              <a:buNone/>
+            </a:pPr>
+            <a:r>
+              <a:rPr lang="en-US" sz="1300" dirty="0">
+                <a:solidFill>
+                  <a:srgbClr val="CFE3EA"/>
+                </a:solidFill>
+                <a:latin typeface="Calibri" pitchFamily="34" charset="0"/>
+                <a:ea typeface="Calibri" pitchFamily="34" charset="-122"/>
+                <a:cs typeface="Calibri" pitchFamily="34" charset="-120"/>
+              </a:rPr>
+              <a:t>Presentazione della lezione. I listati, il programma completo e come provarlo sono nella presentazione del codice:</a:t>
+            </a:r>
+            <a:endParaRPr lang="en-US" sz="1300" dirty="0"/>
+          </a:p>
+          <a:p>
+            <a:pPr algn="r" indent="0" marL="0">
+              <a:buNone/>
+            </a:pPr>
+            <a:r>
+              <a:rPr lang="en-US" sz="1300" dirty="0">
+                <a:solidFill>
+                  <a:srgbClr val="CFE3EA"/>
+                </a:solidFill>
+                <a:latin typeface="Calibri" pitchFamily="34" charset="0"/>
+                <a:ea typeface="Calibri" pitchFamily="34" charset="-122"/>
+                <a:cs typeface="Calibri" pitchFamily="34" charset="-120"/>
+              </a:rPr>
+              <a:t>07-Architettura_dei_Calcolatori-Verm1_Parte_1-Codice.pptx</a:t>
+            </a:r>
+            <a:endParaRPr lang="en-US" sz="1300" dirty="0"/>
+          </a:p>
+        </p:txBody>
+      </p:sp>
+      <p:sp>
+        <p:nvSpPr>
+          <p:cNvPr id="14" name="Shape 12"/>
           <p:cNvSpPr/>
           <p:nvPr/>
         </p:nvSpPr>
@@ -2721,7 +2777,7 @@
       </p:sp>
       <p:pic>
         <p:nvPicPr>
-          <p:cNvPr id="14" name="Image 0" descr="/Users/raffaelemontella/devel/riscv-prg32/computer-architecture-with-prg32/tools/assets/verm1_p1.png">    </p:cNvPr>
+          <p:cNvPr id="15" name="Image 0" descr="/Users/raffaelemontella/devel/riscv-prg32/computer-architecture-with-prg32/tools/assets/verm1_p1.png">    </p:cNvPr>
           <p:cNvPicPr>
             <a:picLocks noChangeAspect="1"/>
           </p:cNvPicPr>

--- a/it/slides/07-Architettura_dei_Calcolatori-Verm1_Parte_1.pptx
+++ b/it/slides/07-Architettura_dei_Calcolatori-Verm1_Parte_1.pptx
@@ -119,31 +119,31 @@
   <p:extLst>
     <p:ext uri="{521415D9-36F7-43E2-AB2F-B90AF26B5E84}">
       <p14:sectionLst xmlns:p14="http://schemas.microsoft.com/office/powerpoint/2010/main">
-        <p14:section name="Apertura" id="{02efde15-7594-321d-c5fa-e17c4cd47fac}">
+        <p14:section name="Apertura" id="{d25e7dee-69b8-35b2-9e19-78ed494560f1}">
           <p14:sldIdLst>
             <p14:sldId id="256"/>
             <p14:sldId id="257"/>
           </p14:sldIdLst>
         </p14:section>
-        <p14:section name="Il progetto" id="{df18654b-25b3-c2c7-0995-0daadeb732fb}">
+        <p14:section name="Il progetto" id="{bc9dccac-8f6f-bcf2-f005-6b0f9b2a88ae}">
           <p14:sldIdLst>
             <p14:sldId id="258"/>
             <p14:sldId id="259"/>
             <p14:sldId id="260"/>
           </p14:sldIdLst>
         </p14:section>
-        <p14:section name="Passo 2: una griglia e una testa" id="{c0880f2d-adf0-a6e2-9e7f-c0796162325e}">
+        <p14:section name="Passo 2: una griglia e una testa" id="{431da823-504f-42b5-a4d6-19fd67e9ab21}">
           <p14:sldIdLst>
             <p14:sldId id="261"/>
           </p14:sldIdLst>
         </p14:section>
-        <p14:section name="Passo 3: il movimento" id="{dcee2378-ce12-0410-6001-d4b4f4a16f56}">
+        <p14:section name="Passo 3: il movimento" id="{4ad7efeb-2266-06fb-6978-11152d362986}">
           <p14:sldIdLst>
             <p14:sldId id="262"/>
             <p14:sldId id="263"/>
           </p14:sldIdLst>
         </p14:section>
-        <p14:section name="Passo 4: guardare dentro con PRG32-QT" id="{773466ce-5aa8-e5ee-d555-89c51637beba}">
+        <p14:section name="Passo 4: guardare dentro con PRG32-QT" id="{a50bdff8-60a5-de27-0ea7-4bd2cdf47b23}">
           <p14:sldIdLst>
             <p14:sldId id="264"/>
             <p14:sldId id="265"/>
@@ -557,6 +557,8 @@
             <a:r>
               <a:rPr lang="en-US" dirty="0"/>
               <a:t>Qui comincia il progetto del corso. È un tutorial, non una lezione: scrivete un programma, passo per passo, e alla fine gira. Usa solo ciò che hanno insegnato le lezioni da 02 a 06: registri e memoria, colori e stringhe come numeri, confronti e scorrimenti, virgola fissa. L'immagine in copertina è ciò che avrete sullo schermo tra due ore: un titolo e un quadrato verde, la testa del verme, che attraversa lo schermo da solo. L'implementazione di riferimento è un contributo di Giuseppe Coviello.
+Stato di apprendimento: DA COMPRENDERE OGGI, alla fine di questa lezione lo spiegate, lo seguite passo passo e lo applicate da soli; DA UTILIZZARE OGGI, oggi seguite e usate la ricetta; come funziona dentro si spiega più avanti, o non fa parte del corso; DA COMPRENDERE PIÙ AVANTI, riconoscete il nome e lo scopo; lo spiega una lezione successiva. Una slide senza etichetta è contesto: una storia, un esempio, una domanda, un esercizio.
+Stato di apprendimento di questa lezione. DA COMPRENDERE OGGI: il progetto Verm1; contratto init/update/draw; un colore è un numero; gli array in memoria; .text, .rodata, .data; indirizzo, valore, load, store; perché si salva ra; shift come moltiplicazione; la virgola fissa; le pseudo-istruzioni; l'ordine little-endian. DA UTILIZZARE OGGI: gli strumenti di PRG32, il debugger di PRG32-QT (si usa, non si studia, in questo corso). DA COMPRENDERE PIÙ AVANTI: formati delle istruzioni (Lezione 19). Una slide senza etichetta è contesto: una storia, un esempio, una domanda, un esercizio.
 Per il docente: Primo tutorial del progetto. Usa solo le Lezioni da 02 a 06: registri, load e store, chiamate (02), stringhe e colori (04), interi, confronti e ritorno a capo (05), virgola fissa (06), e un po' di storia (03). Gli studenti scrivono da sé il programma; il file di riferimento è verm1/verm1_part1.S. Tutto ciò che compare sulle slide di codice è letto da quel file, che viene compilato ed eseguito automaticamente.</a:t>
             </a:r>
             <a:endParaRPr lang="en-US" dirty="0"/>
@@ -646,6 +648,7 @@
             <a:r>
               <a:rPr lang="en-US" dirty="0"/>
               <a:t>La vista della memoria mostra 128 byte in esadecimale a partire dall'indirizzo scritto. Una parola occupa quattro byte, il meno significativo per primo: quando step_q8 vale 240 si legge F0 00 00 00. È l'ordine little-endian della Lezione 04, visto dal vivo. Le variabili stanno in memoria nell'ordine del file: head_x, head_y, step_q8, quindi la colonna della testa sta otto byte prima della frazione. Il debugger osserva soltanto: per cambiare il programma si modifica, si compila e si esegue.
+DA COMPRENDERE OGGI: l'ordine little-endian.
 Per il docente: Ordine dei byte: Lezione 04. Nel file l'ordine è head_x, head_y, step_q8, quattro byte ciascuna: se step_q8 sta all'indirizzo A, head_x sta in A - 8.</a:t>
             </a:r>
             <a:endParaRPr lang="en-US" dirty="0"/>
@@ -915,6 +918,7 @@
             <a:r>
               <a:rPr lang="en-US" dirty="0"/>
               <a:t>Dove siete. Avete una cartuccia che gira e che capite riga per riga. Ha già la forma di ogni gioco: uno stato in memoria, una regola che lo cambia a ogni frame, e una funzione che lo disegna. Manca il giocatore: la testa va dove vuole lei. Le prossime quattro lezioni danno gli strumenti per leggere il joystick e per decidere, bit, maschere e tabelle, e la Parte 2 li usa per aggiungere la guida, il cibo e un punteggio.
+Stato di apprendimento, riepilogo. DA COMPRENDERE OGGI: il progetto Verm1; contratto init/update/draw; un colore è un numero; gli array in memoria; .text, .rodata, .data; indirizzo, valore, load, store; perché si salva ra; shift come moltiplicazione; la virgola fissa; le pseudo-istruzioni; l'ordine little-endian. DA UTILIZZARE OGGI: gli strumenti di PRG32, il debugger di PRG32-QT (si usa, non si studia, in questo corso). DA COMPRENDERE PIÙ AVANTI: formati delle istruzioni (Lezione 19). Una slide senza etichetta è contesto: una storia, un esempio, una domanda, un esercizio.
 Per il docente: File di riferimento di questa parte: verm1/verm1_part1.S (78 righe). Se all'inizio della Parte 2 il programma di uno studente non funziona, si parte da questo file.</a:t>
             </a:r>
             <a:endParaRPr lang="en-US" dirty="0"/>
@@ -1092,6 +1096,7 @@
             <a:r>
               <a:rPr lang="en-US" dirty="0"/>
               <a:t>Verm1, si legge "vermone", è un omaggio a Snake: un verme che si muove su una griglia, mangia, cresce e non deve mordersi. L'idea risale all'arcade Blockade del 1976 ed è diventata celebre sui telefoni Nokia del 1997. È stato scelto perché è abbastanza piccolo da essere scritto da zero in assembly eppure richiede ogni argomento del corso. Scrivete ogni riga voi; sotto non c'è alcun motore. L'immagine a destra è il punto a cui arriverete nella Parte 4.
+DA COMPRENDERE OGGI: il progetto Verm1.
 Per il docente: Snake per il Nokia 6110 fu scritto da Taneli Armanto. Verm1 è un omaggio, non una copia: il nome, le regole di dettaglio e l'aspetto sono nostri. L'implementazione di riferimento seguita dai tutorial è un contributo di Giuseppe Coviello.</a:t>
             </a:r>
             <a:endParaRPr lang="en-US" dirty="0"/>
@@ -1181,6 +1186,7 @@
             <a:r>
               <a:rPr lang="en-US" dirty="0"/>
               <a:t>Il piano del progetto. Ogni riga è un tutorial, ciò che vi si aggiunge e le lezioni che usa. Parte 1, oggi: una griglia, una testa, il movimento automatico. Parte 2, Lezione 12: la guida, il cibo, un punteggio. Parte 3, Lezione 17: un corpo che cresce e le collisioni. Parte 4, Lezione 22: il gioco finito. La Lezione 23 prepara il bundle per lo Store. Una regola vale per ogni parte: mai cominciare con un programma che non gira; se il vostro è rotto, partite dal file di riferimento.
+DA COMPRENDERE OGGI: il progetto Verm1.
 Per il docente: Ogni parte finisce con un programma che gira. Non cominciare mai una parte con un programma che non gira: se il proprio è rotto, si parte dal file di riferimento della parte precedente.</a:t>
             </a:r>
             <a:endParaRPr lang="en-US" dirty="0"/>
@@ -1358,6 +1364,7 @@
             <a:r>
               <a:rPr lang="en-US" dirty="0"/>
               <a:t>Il verme non vive nei pixel: vive nelle celle. Una posizione è una colonna da 0 a 39 e una riga da 0 a 23, e la testa parte dalla colonna 5 della riga 12, la cella chiara nel disegno. Per disegnare una cella le sue coordinate si trasformano in pixel: x è la colonna per 8, uno scorrimento a sinistra di 3; y è la riga per 8 più 8, perché prima viene la riga del titolo. Pensare in celle rende semplici tutte le regole successive: muoversi è sommare 1, e due cose si scontrano quando le loro celle sono uguali.
+DA COMPRENDERE OGGI: gli array in memoria.
 Per il docente: Disegnare la griglia alla lavagna e chiedere le coordinate in pixel di alcune celle: (0,0) sta in (0,8); (39,23) sta in (312,192).</a:t>
             </a:r>
             <a:endParaRPr lang="en-US" dirty="0"/>
@@ -1447,6 +1454,7 @@
             <a:r>
               <a:rPr lang="en-US" dirty="0"/>
               <a:t>update viene eseguita circa trenta volte al secondo. A una cella per frame la testa attraverserebbe le quaranta colonne in poco più di un secondo. Vogliamo una frazione di cella per frame. Teniamo quindi una frazione in unità di 1/256 di cella, le sommiamo la velocità a ogni frame, e facciamo un passo ogni volta che si è accumulata una cella intera, 256. Con SPEED_Q8 uguale a 40 la testa avanza di 40/256 di cella per frame: un passo ogni sei frame circa. Il resto si conserva, quindi in media la velocità è esatta.
+DA COMPRENDERE OGGI: la virgola fissa.
 Per il docente: È la palla della Lezione 06, trasformata in un timer. Il resto si conserva, quindi la velocità media è esatta: 256 frame danno esattamente 40 passi.</a:t>
             </a:r>
             <a:endParaRPr lang="en-US" dirty="0"/>
@@ -1536,6 +1544,7 @@
             <a:r>
               <a:rPr lang="en-US" dirty="0"/>
               <a:t>Una traccia a mano, l'esercizio più utile del tutorial. A ogni frame si somma 40 alla frazione. Nei frame da 1 a 6 la somma resta sotto 256 e la testa non si muove. Al frame 7 arriva a 280: si è accumulata una cella intera, si sottrae 256, resta 24, e la testa passa dalla colonna 5 alla colonna 6. I passi arrivano ogni sei o sette frame, e il resto porta con sé la differenza, come il giorno in più di un anno bisestile. Compilate voi i frame da 8 a 12.
+DA COMPRENDERE OGGI: la virgola fissa.
 Per il docente: Dopo 64 frame la somma è 64 x 40 = 2560 = 10 x 256: dieci passi, testa nella colonna 15, esattamente ciò che mostra la schermata. Chiedere agli studenti di compilare i frame da 8 a 12.</a:t>
             </a:r>
             <a:endParaRPr lang="en-US" dirty="0"/>
@@ -1625,6 +1634,7 @@
             <a:r>
               <a:rPr lang="en-US" dirty="0"/>
               <a:t>Una procedura precisa. Attivate la modalità debug in Settings ed eseguite la cartuccia. Premete Update: il listato mostra verm1_update. Cliccate nel margine accanto alla sua prima istruzione per mettere un breakpoint: il programma si ferma lì al frame successivo. Ora avanzate, un'istruzione alla volta, e osservate i registri. Dopo le due istruzioni che realizzano la, t0 contiene un indirizzo: scrivetelo nel campo Memory e vedrete i byte di step_q8. Ogni Resume esegue un frame, e il valore cresce di 40, 0x28.
+DA UTILIZZARE OGGI: il debugger di PRG32-QT (si usa, non si studia, in questo corso).
 Per il docente: Dalla guida al debug di PRG32-QT: pausa, ripresa, passo; viste Init / Update / Draw / PC; breakpoint nel margine; una vista di 128 byte di memoria. Resume ignora una volta il breakpoint corrente, quindi ogni pressione di Resume esegue un frame intero.</a:t>
             </a:r>
             <a:endParaRPr lang="en-US" dirty="0"/>
@@ -2801,6 +2811,420 @@
       </p:pic>
       <p:sp>
         <p:nvSpPr>
+          <p:cNvPr id="16" name="Shape 13"/>
+          <p:cNvSpPr/>
+          <p:nvPr/>
+        </p:nvSpPr>
+        <p:spPr>
+          <a:xfrm>
+            <a:off x="8910777" y="91440"/>
+            <a:ext cx="2732278" cy="274320"/>
+          </a:xfrm>
+          <a:prstGeom prst="rect">
+            <a:avLst/>
+          </a:prstGeom>
+          <a:solidFill>
+            <a:srgbClr val="F3E8FF"/>
+          </a:solidFill>
+          <a:ln w="12700">
+            <a:solidFill>
+              <a:srgbClr val="7E22CE"/>
+            </a:solidFill>
+            <a:prstDash val="dash"/>
+          </a:ln>
+        </p:spPr>
+      </p:sp>
+      <p:sp>
+        <p:nvSpPr>
+          <p:cNvPr id="17" name="Shape 14"/>
+          <p:cNvSpPr/>
+          <p:nvPr/>
+        </p:nvSpPr>
+        <p:spPr>
+          <a:xfrm>
+            <a:off x="8938209" y="128016"/>
+            <a:ext cx="45720" cy="45720"/>
+          </a:xfrm>
+          <a:prstGeom prst="rect">
+            <a:avLst/>
+          </a:prstGeom>
+          <a:solidFill>
+            <a:srgbClr val="7E22CE"/>
+          </a:solidFill>
+          <a:ln w="12700">
+            <a:solidFill>
+              <a:srgbClr val="7E22CE"/>
+            </a:solidFill>
+            <a:prstDash val="solid"/>
+          </a:ln>
+        </p:spPr>
+      </p:sp>
+      <p:sp>
+        <p:nvSpPr>
+          <p:cNvPr id="18" name="Shape 15"/>
+          <p:cNvSpPr/>
+          <p:nvPr/>
+        </p:nvSpPr>
+        <p:spPr>
+          <a:xfrm>
+            <a:off x="8938209" y="205740"/>
+            <a:ext cx="45720" cy="45720"/>
+          </a:xfrm>
+          <a:prstGeom prst="rect">
+            <a:avLst/>
+          </a:prstGeom>
+          <a:solidFill>
+            <a:srgbClr val="7E22CE"/>
+          </a:solidFill>
+          <a:ln w="12700">
+            <a:solidFill>
+              <a:srgbClr val="7E22CE"/>
+            </a:solidFill>
+            <a:prstDash val="solid"/>
+          </a:ln>
+        </p:spPr>
+      </p:sp>
+      <p:sp>
+        <p:nvSpPr>
+          <p:cNvPr id="19" name="Shape 16"/>
+          <p:cNvSpPr/>
+          <p:nvPr/>
+        </p:nvSpPr>
+        <p:spPr>
+          <a:xfrm>
+            <a:off x="8938209" y="283464"/>
+            <a:ext cx="45720" cy="45720"/>
+          </a:xfrm>
+          <a:prstGeom prst="rect">
+            <a:avLst/>
+          </a:prstGeom>
+          <a:solidFill>
+            <a:srgbClr val="7E22CE"/>
+          </a:solidFill>
+          <a:ln w="12700">
+            <a:solidFill>
+              <a:srgbClr val="7E22CE"/>
+            </a:solidFill>
+            <a:prstDash val="solid"/>
+          </a:ln>
+        </p:spPr>
+      </p:sp>
+      <p:pic>
+        <p:nvPicPr>
+          <p:cNvPr id="20" name="Image 1" descr="preencoded.png">    </p:cNvPr>
+          <p:cNvPicPr>
+            <a:picLocks noChangeAspect="1"/>
+          </p:cNvPicPr>
+          <p:nvPr/>
+        </p:nvPicPr>
+        <p:blipFill>
+          <a:blip r:embed="rId2"/>
+          <a:stretch>
+            <a:fillRect/>
+          </a:stretch>
+        </p:blipFill>
+        <p:spPr>
+          <a:xfrm>
+            <a:off x="9038793" y="128016"/>
+            <a:ext cx="201168" cy="201168"/>
+          </a:xfrm>
+          <a:prstGeom prst="rect">
+            <a:avLst/>
+          </a:prstGeom>
+        </p:spPr>
+      </p:pic>
+      <p:sp>
+        <p:nvSpPr>
+          <p:cNvPr id="21" name="Text 17"/>
+          <p:cNvSpPr txBox="1"/>
+          <p:nvPr/>
+        </p:nvSpPr>
+        <p:spPr>
+          <a:xfrm>
+            <a:off x="9294825" y="91440"/>
+            <a:ext cx="2311654" cy="274320"/>
+          </a:xfrm>
+          <a:prstGeom prst="rect">
+            <a:avLst/>
+          </a:prstGeom>
+          <a:noFill/>
+          <a:ln/>
+        </p:spPr>
+        <p:txBody>
+          <a:bodyPr wrap="square" lIns="0" tIns="0" rIns="0" bIns="0" rtlCol="0" anchor="ctr"/>
+          <a:lstStyle/>
+          <a:p>
+            <a:pPr indent="0" marL="0">
+              <a:buNone/>
+            </a:pPr>
+            <a:r>
+              <a:rPr lang="en-US" sz="1100" b="1" dirty="0">
+                <a:solidFill>
+                  <a:srgbClr val="6B21A8"/>
+                </a:solidFill>
+                <a:latin typeface="Calibri" pitchFamily="34" charset="0"/>
+                <a:ea typeface="Calibri" pitchFamily="34" charset="-122"/>
+                <a:cs typeface="Calibri" pitchFamily="34" charset="-120"/>
+              </a:rPr>
+              <a:t>DA COMPRENDERE PIÙ AVANTI</a:t>
+            </a:r>
+            <a:endParaRPr lang="en-US" sz="1100" dirty="0"/>
+          </a:p>
+        </p:txBody>
+      </p:sp>
+      <p:sp>
+        <p:nvSpPr>
+          <p:cNvPr id="22" name="Shape 18"/>
+          <p:cNvSpPr/>
+          <p:nvPr/>
+        </p:nvSpPr>
+        <p:spPr>
+          <a:xfrm>
+            <a:off x="6675069" y="91440"/>
+            <a:ext cx="2125980" cy="274320"/>
+          </a:xfrm>
+          <a:prstGeom prst="rect">
+            <a:avLst/>
+          </a:prstGeom>
+          <a:solidFill>
+            <a:srgbClr val="FEF3C7"/>
+          </a:solidFill>
+          <a:ln w="12700">
+            <a:solidFill>
+              <a:srgbClr val="B45309"/>
+            </a:solidFill>
+            <a:prstDash val="solid"/>
+          </a:ln>
+        </p:spPr>
+      </p:sp>
+      <p:sp>
+        <p:nvSpPr>
+          <p:cNvPr id="23" name="Shape 19"/>
+          <p:cNvSpPr/>
+          <p:nvPr/>
+        </p:nvSpPr>
+        <p:spPr>
+          <a:xfrm>
+            <a:off x="6675069" y="91440"/>
+            <a:ext cx="27432" cy="274320"/>
+          </a:xfrm>
+          <a:prstGeom prst="rect">
+            <a:avLst/>
+          </a:prstGeom>
+          <a:solidFill>
+            <a:srgbClr val="B45309"/>
+          </a:solidFill>
+          <a:ln w="12700">
+            <a:solidFill>
+              <a:srgbClr val="B45309"/>
+            </a:solidFill>
+            <a:prstDash val="solid"/>
+          </a:ln>
+        </p:spPr>
+      </p:sp>
+      <p:sp>
+        <p:nvSpPr>
+          <p:cNvPr id="24" name="Shape 20"/>
+          <p:cNvSpPr/>
+          <p:nvPr/>
+        </p:nvSpPr>
+        <p:spPr>
+          <a:xfrm>
+            <a:off x="6729933" y="91440"/>
+            <a:ext cx="27432" cy="274320"/>
+          </a:xfrm>
+          <a:prstGeom prst="rect">
+            <a:avLst/>
+          </a:prstGeom>
+          <a:solidFill>
+            <a:srgbClr val="B45309"/>
+          </a:solidFill>
+          <a:ln w="12700">
+            <a:solidFill>
+              <a:srgbClr val="B45309"/>
+            </a:solidFill>
+            <a:prstDash val="solid"/>
+          </a:ln>
+        </p:spPr>
+      </p:sp>
+      <p:pic>
+        <p:nvPicPr>
+          <p:cNvPr id="25" name="Image 2" descr="preencoded.png">    </p:cNvPr>
+          <p:cNvPicPr>
+            <a:picLocks noChangeAspect="1"/>
+          </p:cNvPicPr>
+          <p:nvPr/>
+        </p:nvPicPr>
+        <p:blipFill>
+          <a:blip r:embed="rId3"/>
+          <a:stretch>
+            <a:fillRect/>
+          </a:stretch>
+        </p:blipFill>
+        <p:spPr>
+          <a:xfrm>
+            <a:off x="6803085" y="128016"/>
+            <a:ext cx="201168" cy="201168"/>
+          </a:xfrm>
+          <a:prstGeom prst="rect">
+            <a:avLst/>
+          </a:prstGeom>
+        </p:spPr>
+      </p:pic>
+      <p:sp>
+        <p:nvSpPr>
+          <p:cNvPr id="26" name="Text 21"/>
+          <p:cNvSpPr txBox="1"/>
+          <p:nvPr/>
+        </p:nvSpPr>
+        <p:spPr>
+          <a:xfrm>
+            <a:off x="7059117" y="91440"/>
+            <a:ext cx="1705356" cy="274320"/>
+          </a:xfrm>
+          <a:prstGeom prst="rect">
+            <a:avLst/>
+          </a:prstGeom>
+          <a:noFill/>
+          <a:ln/>
+        </p:spPr>
+        <p:txBody>
+          <a:bodyPr wrap="square" lIns="0" tIns="0" rIns="0" bIns="0" rtlCol="0" anchor="ctr"/>
+          <a:lstStyle/>
+          <a:p>
+            <a:pPr indent="0" marL="0">
+              <a:buNone/>
+            </a:pPr>
+            <a:r>
+              <a:rPr lang="en-US" sz="1100" b="1" dirty="0">
+                <a:solidFill>
+                  <a:srgbClr val="92400E"/>
+                </a:solidFill>
+                <a:latin typeface="Calibri" pitchFamily="34" charset="0"/>
+                <a:ea typeface="Calibri" pitchFamily="34" charset="-122"/>
+                <a:cs typeface="Calibri" pitchFamily="34" charset="-120"/>
+              </a:rPr>
+              <a:t>DA UTILIZZARE OGGI</a:t>
+            </a:r>
+            <a:endParaRPr lang="en-US" sz="1100" dirty="0"/>
+          </a:p>
+        </p:txBody>
+      </p:sp>
+      <p:sp>
+        <p:nvSpPr>
+          <p:cNvPr id="27" name="Shape 22"/>
+          <p:cNvSpPr/>
+          <p:nvPr/>
+        </p:nvSpPr>
+        <p:spPr>
+          <a:xfrm>
+            <a:off x="4352747" y="91440"/>
+            <a:ext cx="2212594" cy="274320"/>
+          </a:xfrm>
+          <a:prstGeom prst="rect">
+            <a:avLst/>
+          </a:prstGeom>
+          <a:solidFill>
+            <a:srgbClr val="E0F2FE"/>
+          </a:solidFill>
+          <a:ln w="12700">
+            <a:solidFill>
+              <a:srgbClr val="0369A1"/>
+            </a:solidFill>
+            <a:prstDash val="solid"/>
+          </a:ln>
+        </p:spPr>
+      </p:sp>
+      <p:sp>
+        <p:nvSpPr>
+          <p:cNvPr id="28" name="Shape 23"/>
+          <p:cNvSpPr/>
+          <p:nvPr/>
+        </p:nvSpPr>
+        <p:spPr>
+          <a:xfrm>
+            <a:off x="4352747" y="91440"/>
+            <a:ext cx="73152" cy="274320"/>
+          </a:xfrm>
+          <a:prstGeom prst="rect">
+            <a:avLst/>
+          </a:prstGeom>
+          <a:solidFill>
+            <a:srgbClr val="0369A1"/>
+          </a:solidFill>
+          <a:ln w="12700">
+            <a:solidFill>
+              <a:srgbClr val="0369A1"/>
+            </a:solidFill>
+            <a:prstDash val="solid"/>
+          </a:ln>
+        </p:spPr>
+      </p:sp>
+      <p:pic>
+        <p:nvPicPr>
+          <p:cNvPr id="29" name="Image 3" descr="preencoded.png">    </p:cNvPr>
+          <p:cNvPicPr>
+            <a:picLocks noChangeAspect="1"/>
+          </p:cNvPicPr>
+          <p:nvPr/>
+        </p:nvPicPr>
+        <p:blipFill>
+          <a:blip r:embed="rId4"/>
+          <a:stretch>
+            <a:fillRect/>
+          </a:stretch>
+        </p:blipFill>
+        <p:spPr>
+          <a:xfrm>
+            <a:off x="4480763" y="128016"/>
+            <a:ext cx="201168" cy="201168"/>
+          </a:xfrm>
+          <a:prstGeom prst="rect">
+            <a:avLst/>
+          </a:prstGeom>
+        </p:spPr>
+      </p:pic>
+      <p:sp>
+        <p:nvSpPr>
+          <p:cNvPr id="30" name="Text 24"/>
+          <p:cNvSpPr txBox="1"/>
+          <p:nvPr/>
+        </p:nvSpPr>
+        <p:spPr>
+          <a:xfrm>
+            <a:off x="4736795" y="91440"/>
+            <a:ext cx="1791970" cy="274320"/>
+          </a:xfrm>
+          <a:prstGeom prst="rect">
+            <a:avLst/>
+          </a:prstGeom>
+          <a:noFill/>
+          <a:ln/>
+        </p:spPr>
+        <p:txBody>
+          <a:bodyPr wrap="square" lIns="0" tIns="0" rIns="0" bIns="0" rtlCol="0" anchor="ctr"/>
+          <a:lstStyle/>
+          <a:p>
+            <a:pPr indent="0" marL="0">
+              <a:buNone/>
+            </a:pPr>
+            <a:r>
+              <a:rPr lang="en-US" sz="1100" b="1" dirty="0">
+                <a:solidFill>
+                  <a:srgbClr val="075985"/>
+                </a:solidFill>
+                <a:latin typeface="Calibri" pitchFamily="34" charset="0"/>
+                <a:ea typeface="Calibri" pitchFamily="34" charset="-122"/>
+                <a:cs typeface="Calibri" pitchFamily="34" charset="-120"/>
+              </a:rPr>
+              <a:t>DA COMPRENDERE OGGI</a:t>
+            </a:r>
+            <a:endParaRPr lang="en-US" sz="1100" dirty="0"/>
+          </a:p>
+        </p:txBody>
+      </p:sp>
+      <p:sp>
+        <p:nvSpPr>
           <p:cNvPr id="25" name="Slide Number Placeholder 0"/>
           <p:cNvSpPr>
             <a:spLocks noGrp="1"/>
@@ -3313,6 +3737,133 @@
       </p:sp>
       <p:sp>
         <p:nvSpPr>
+          <p:cNvPr id="15" name="Shape 12"/>
+          <p:cNvSpPr/>
+          <p:nvPr/>
+        </p:nvSpPr>
+        <p:spPr>
+          <a:xfrm>
+            <a:off x="7788986" y="91440"/>
+            <a:ext cx="3854069" cy="274320"/>
+          </a:xfrm>
+          <a:prstGeom prst="rect">
+            <a:avLst/>
+          </a:prstGeom>
+          <a:solidFill>
+            <a:srgbClr val="E0F2FE"/>
+          </a:solidFill>
+          <a:ln w="12700">
+            <a:solidFill>
+              <a:srgbClr val="0369A1"/>
+            </a:solidFill>
+            <a:prstDash val="solid"/>
+          </a:ln>
+        </p:spPr>
+      </p:sp>
+      <p:sp>
+        <p:nvSpPr>
+          <p:cNvPr id="16" name="Shape 13"/>
+          <p:cNvSpPr/>
+          <p:nvPr/>
+        </p:nvSpPr>
+        <p:spPr>
+          <a:xfrm>
+            <a:off x="7788986" y="91440"/>
+            <a:ext cx="73152" cy="274320"/>
+          </a:xfrm>
+          <a:prstGeom prst="rect">
+            <a:avLst/>
+          </a:prstGeom>
+          <a:solidFill>
+            <a:srgbClr val="0369A1"/>
+          </a:solidFill>
+          <a:ln w="12700">
+            <a:solidFill>
+              <a:srgbClr val="0369A1"/>
+            </a:solidFill>
+            <a:prstDash val="solid"/>
+          </a:ln>
+        </p:spPr>
+      </p:sp>
+      <p:pic>
+        <p:nvPicPr>
+          <p:cNvPr id="17" name="Image 1" descr="preencoded.png">    </p:cNvPr>
+          <p:cNvPicPr>
+            <a:picLocks noChangeAspect="1"/>
+          </p:cNvPicPr>
+          <p:nvPr/>
+        </p:nvPicPr>
+        <p:blipFill>
+          <a:blip r:embed="rId2"/>
+          <a:stretch>
+            <a:fillRect/>
+          </a:stretch>
+        </p:blipFill>
+        <p:spPr>
+          <a:xfrm>
+            <a:off x="7917002" y="128016"/>
+            <a:ext cx="201168" cy="201168"/>
+          </a:xfrm>
+          <a:prstGeom prst="rect">
+            <a:avLst/>
+          </a:prstGeom>
+        </p:spPr>
+      </p:pic>
+      <p:sp>
+        <p:nvSpPr>
+          <p:cNvPr id="18" name="Text 14"/>
+          <p:cNvSpPr txBox="1"/>
+          <p:nvPr/>
+        </p:nvSpPr>
+        <p:spPr>
+          <a:xfrm>
+            <a:off x="8173034" y="91440"/>
+            <a:ext cx="3433445" cy="274320"/>
+          </a:xfrm>
+          <a:prstGeom prst="rect">
+            <a:avLst/>
+          </a:prstGeom>
+          <a:noFill/>
+          <a:ln/>
+        </p:spPr>
+        <p:txBody>
+          <a:bodyPr wrap="square" lIns="0" tIns="0" rIns="0" bIns="0" rtlCol="0" anchor="ctr"/>
+          <a:lstStyle/>
+          <a:p>
+            <a:pPr indent="0" marL="0">
+              <a:buNone/>
+            </a:pPr>
+            <a:r>
+              <a:rPr lang="en-US" sz="1100" b="1" dirty="0">
+                <a:solidFill>
+                  <a:srgbClr val="075985"/>
+                </a:solidFill>
+                <a:latin typeface="Calibri" pitchFamily="34" charset="0"/>
+                <a:ea typeface="Calibri" pitchFamily="34" charset="-122"/>
+                <a:cs typeface="Calibri" pitchFamily="34" charset="-120"/>
+              </a:rPr>
+              <a:t>DA COMPRENDERE OGGI</a:t>
+            </a:r>
+            <a:pPr indent="0" marL="0">
+              <a:buNone/>
+            </a:pPr>
+            <a:r>
+              <a:rPr lang="en-US" sz="1100" dirty="0">
+                <a:solidFill>
+                  <a:srgbClr val="075985"/>
+                </a:solidFill>
+                <a:latin typeface="Calibri" pitchFamily="34" charset="0"/>
+                <a:ea typeface="Calibri" pitchFamily="34" charset="-122"/>
+                <a:cs typeface="Calibri" pitchFamily="34" charset="-120"/>
+              </a:rPr>
+              <a:t> · l'ordine little-endian</a:t>
+            </a:r>
+            <a:endParaRPr lang="en-US" sz="1100" dirty="0"/>
+          </a:p>
+        </p:txBody>
+      </p:sp>
+      <p:sp>
+        <p:nvSpPr>
           <p:cNvPr id="25" name="Slide Number Placeholder 0"/>
           <p:cNvSpPr>
             <a:spLocks noGrp="1"/>
@@ -6663,6 +7214,133 @@
               <a:t>Verm1 alla fine del corso (Parte 4)</a:t>
             </a:r>
             <a:endParaRPr lang="en-US" sz="1200" dirty="0"/>
+          </a:p>
+        </p:txBody>
+      </p:sp>
+      <p:sp>
+        <p:nvSpPr>
+          <p:cNvPr id="15" name="Shape 12"/>
+          <p:cNvSpPr/>
+          <p:nvPr/>
+        </p:nvSpPr>
+        <p:spPr>
+          <a:xfrm>
+            <a:off x="8117281" y="91440"/>
+            <a:ext cx="3525774" cy="274320"/>
+          </a:xfrm>
+          <a:prstGeom prst="rect">
+            <a:avLst/>
+          </a:prstGeom>
+          <a:solidFill>
+            <a:srgbClr val="E0F2FE"/>
+          </a:solidFill>
+          <a:ln w="12700">
+            <a:solidFill>
+              <a:srgbClr val="0369A1"/>
+            </a:solidFill>
+            <a:prstDash val="solid"/>
+          </a:ln>
+        </p:spPr>
+      </p:sp>
+      <p:sp>
+        <p:nvSpPr>
+          <p:cNvPr id="16" name="Shape 13"/>
+          <p:cNvSpPr/>
+          <p:nvPr/>
+        </p:nvSpPr>
+        <p:spPr>
+          <a:xfrm>
+            <a:off x="8117281" y="91440"/>
+            <a:ext cx="73152" cy="274320"/>
+          </a:xfrm>
+          <a:prstGeom prst="rect">
+            <a:avLst/>
+          </a:prstGeom>
+          <a:solidFill>
+            <a:srgbClr val="0369A1"/>
+          </a:solidFill>
+          <a:ln w="12700">
+            <a:solidFill>
+              <a:srgbClr val="0369A1"/>
+            </a:solidFill>
+            <a:prstDash val="solid"/>
+          </a:ln>
+        </p:spPr>
+      </p:sp>
+      <p:pic>
+        <p:nvPicPr>
+          <p:cNvPr id="17" name="Image 1" descr="preencoded.png">    </p:cNvPr>
+          <p:cNvPicPr>
+            <a:picLocks noChangeAspect="1"/>
+          </p:cNvPicPr>
+          <p:nvPr/>
+        </p:nvPicPr>
+        <p:blipFill>
+          <a:blip r:embed="rId2"/>
+          <a:stretch>
+            <a:fillRect/>
+          </a:stretch>
+        </p:blipFill>
+        <p:spPr>
+          <a:xfrm>
+            <a:off x="8245297" y="128016"/>
+            <a:ext cx="201168" cy="201168"/>
+          </a:xfrm>
+          <a:prstGeom prst="rect">
+            <a:avLst/>
+          </a:prstGeom>
+        </p:spPr>
+      </p:pic>
+      <p:sp>
+        <p:nvSpPr>
+          <p:cNvPr id="18" name="Text 14"/>
+          <p:cNvSpPr txBox="1"/>
+          <p:nvPr/>
+        </p:nvSpPr>
+        <p:spPr>
+          <a:xfrm>
+            <a:off x="8501329" y="91440"/>
+            <a:ext cx="3105150" cy="274320"/>
+          </a:xfrm>
+          <a:prstGeom prst="rect">
+            <a:avLst/>
+          </a:prstGeom>
+          <a:noFill/>
+          <a:ln/>
+        </p:spPr>
+        <p:txBody>
+          <a:bodyPr wrap="square" lIns="0" tIns="0" rIns="0" bIns="0" rtlCol="0" anchor="ctr"/>
+          <a:lstStyle/>
+          <a:p>
+            <a:pPr indent="0" marL="0">
+              <a:buNone/>
+            </a:pPr>
+            <a:r>
+              <a:rPr lang="en-US" sz="1100" b="1" dirty="0">
+                <a:solidFill>
+                  <a:srgbClr val="075985"/>
+                </a:solidFill>
+                <a:latin typeface="Calibri" pitchFamily="34" charset="0"/>
+                <a:ea typeface="Calibri" pitchFamily="34" charset="-122"/>
+                <a:cs typeface="Calibri" pitchFamily="34" charset="-120"/>
+              </a:rPr>
+              <a:t>DA COMPRENDERE OGGI</a:t>
+            </a:r>
+            <a:pPr indent="0" marL="0">
+              <a:buNone/>
+            </a:pPr>
+            <a:r>
+              <a:rPr lang="en-US" sz="1100" dirty="0">
+                <a:solidFill>
+                  <a:srgbClr val="075985"/>
+                </a:solidFill>
+                <a:latin typeface="Calibri" pitchFamily="34" charset="0"/>
+                <a:ea typeface="Calibri" pitchFamily="34" charset="-122"/>
+                <a:cs typeface="Calibri" pitchFamily="34" charset="-120"/>
+              </a:rPr>
+              <a:t> · il progetto Verm1</a:t>
+            </a:r>
+            <a:endParaRPr lang="en-US" sz="1100" dirty="0"/>
           </a:p>
         </p:txBody>
       </p:sp>
@@ -8049,6 +8727,133 @@
       </p:graphicFrame>
       <p:sp>
         <p:nvSpPr>
+          <p:cNvPr id="4" name="Shape 1"/>
+          <p:cNvSpPr/>
+          <p:nvPr/>
+        </p:nvSpPr>
+        <p:spPr>
+          <a:xfrm>
+            <a:off x="8117281" y="91440"/>
+            <a:ext cx="3525774" cy="274320"/>
+          </a:xfrm>
+          <a:prstGeom prst="rect">
+            <a:avLst/>
+          </a:prstGeom>
+          <a:solidFill>
+            <a:srgbClr val="E0F2FE"/>
+          </a:solidFill>
+          <a:ln w="12700">
+            <a:solidFill>
+              <a:srgbClr val="0369A1"/>
+            </a:solidFill>
+            <a:prstDash val="solid"/>
+          </a:ln>
+        </p:spPr>
+      </p:sp>
+      <p:sp>
+        <p:nvSpPr>
+          <p:cNvPr id="5" name="Shape 2"/>
+          <p:cNvSpPr/>
+          <p:nvPr/>
+        </p:nvSpPr>
+        <p:spPr>
+          <a:xfrm>
+            <a:off x="8117281" y="91440"/>
+            <a:ext cx="73152" cy="274320"/>
+          </a:xfrm>
+          <a:prstGeom prst="rect">
+            <a:avLst/>
+          </a:prstGeom>
+          <a:solidFill>
+            <a:srgbClr val="0369A1"/>
+          </a:solidFill>
+          <a:ln w="12700">
+            <a:solidFill>
+              <a:srgbClr val="0369A1"/>
+            </a:solidFill>
+            <a:prstDash val="solid"/>
+          </a:ln>
+        </p:spPr>
+      </p:sp>
+      <p:pic>
+        <p:nvPicPr>
+          <p:cNvPr id="6" name="Image 0" descr="preencoded.png">    </p:cNvPr>
+          <p:cNvPicPr>
+            <a:picLocks noChangeAspect="1"/>
+          </p:cNvPicPr>
+          <p:nvPr/>
+        </p:nvPicPr>
+        <p:blipFill>
+          <a:blip r:embed="rId1"/>
+          <a:stretch>
+            <a:fillRect/>
+          </a:stretch>
+        </p:blipFill>
+        <p:spPr>
+          <a:xfrm>
+            <a:off x="8245297" y="128016"/>
+            <a:ext cx="201168" cy="201168"/>
+          </a:xfrm>
+          <a:prstGeom prst="rect">
+            <a:avLst/>
+          </a:prstGeom>
+        </p:spPr>
+      </p:pic>
+      <p:sp>
+        <p:nvSpPr>
+          <p:cNvPr id="7" name="Text 3"/>
+          <p:cNvSpPr txBox="1"/>
+          <p:nvPr/>
+        </p:nvSpPr>
+        <p:spPr>
+          <a:xfrm>
+            <a:off x="8501329" y="91440"/>
+            <a:ext cx="3105150" cy="274320"/>
+          </a:xfrm>
+          <a:prstGeom prst="rect">
+            <a:avLst/>
+          </a:prstGeom>
+          <a:noFill/>
+          <a:ln/>
+        </p:spPr>
+        <p:txBody>
+          <a:bodyPr wrap="square" lIns="0" tIns="0" rIns="0" bIns="0" rtlCol="0" anchor="ctr"/>
+          <a:lstStyle/>
+          <a:p>
+            <a:pPr indent="0" marL="0">
+              <a:buNone/>
+            </a:pPr>
+            <a:r>
+              <a:rPr lang="en-US" sz="1100" b="1" dirty="0">
+                <a:solidFill>
+                  <a:srgbClr val="075985"/>
+                </a:solidFill>
+                <a:latin typeface="Calibri" pitchFamily="34" charset="0"/>
+                <a:ea typeface="Calibri" pitchFamily="34" charset="-122"/>
+                <a:cs typeface="Calibri" pitchFamily="34" charset="-120"/>
+              </a:rPr>
+              <a:t>DA COMPRENDERE OGGI</a:t>
+            </a:r>
+            <a:pPr indent="0" marL="0">
+              <a:buNone/>
+            </a:pPr>
+            <a:r>
+              <a:rPr lang="en-US" sz="1100" dirty="0">
+                <a:solidFill>
+                  <a:srgbClr val="075985"/>
+                </a:solidFill>
+                <a:latin typeface="Calibri" pitchFamily="34" charset="0"/>
+                <a:ea typeface="Calibri" pitchFamily="34" charset="-122"/>
+                <a:cs typeface="Calibri" pitchFamily="34" charset="-120"/>
+              </a:rPr>
+              <a:t> · il progetto Verm1</a:t>
+            </a:r>
+            <a:endParaRPr lang="en-US" sz="1100" dirty="0"/>
+          </a:p>
+        </p:txBody>
+      </p:sp>
+      <p:sp>
+        <p:nvSpPr>
           <p:cNvPr id="25" name="Slide Number Placeholder 0"/>
           <p:cNvSpPr>
             <a:spLocks noGrp="1"/>
@@ -9542,9 +10347,59 @@
           </a:p>
         </p:txBody>
       </p:sp>
+      <p:sp>
+        <p:nvSpPr>
+          <p:cNvPr id="3" name="Shape 1"/>
+          <p:cNvSpPr/>
+          <p:nvPr/>
+        </p:nvSpPr>
+        <p:spPr>
+          <a:xfrm>
+            <a:off x="7920304" y="91440"/>
+            <a:ext cx="3722751" cy="274320"/>
+          </a:xfrm>
+          <a:prstGeom prst="rect">
+            <a:avLst/>
+          </a:prstGeom>
+          <a:solidFill>
+            <a:srgbClr val="E0F2FE"/>
+          </a:solidFill>
+          <a:ln w="12700">
+            <a:solidFill>
+              <a:srgbClr val="0369A1"/>
+            </a:solidFill>
+            <a:prstDash val="solid"/>
+          </a:ln>
+        </p:spPr>
+      </p:sp>
+      <p:sp>
+        <p:nvSpPr>
+          <p:cNvPr id="4" name="Shape 2"/>
+          <p:cNvSpPr/>
+          <p:nvPr/>
+        </p:nvSpPr>
+        <p:spPr>
+          <a:xfrm>
+            <a:off x="7920304" y="91440"/>
+            <a:ext cx="73152" cy="274320"/>
+          </a:xfrm>
+          <a:prstGeom prst="rect">
+            <a:avLst/>
+          </a:prstGeom>
+          <a:solidFill>
+            <a:srgbClr val="0369A1"/>
+          </a:solidFill>
+          <a:ln w="12700">
+            <a:solidFill>
+              <a:srgbClr val="0369A1"/>
+            </a:solidFill>
+            <a:prstDash val="solid"/>
+          </a:ln>
+        </p:spPr>
+      </p:sp>
       <p:pic>
         <p:nvPicPr>
-          <p:cNvPr id="4" name="Image 0" descr="preencoded.png">    </p:cNvPr>
+          <p:cNvPr id="5" name="Image 0" descr="preencoded.png">    </p:cNvPr>
           <p:cNvPicPr>
             <a:picLocks noChangeAspect="1"/>
           </p:cNvPicPr>
@@ -9558,6 +10413,83 @@
         </p:blipFill>
         <p:spPr>
           <a:xfrm>
+            <a:off x="8048320" y="128016"/>
+            <a:ext cx="201168" cy="201168"/>
+          </a:xfrm>
+          <a:prstGeom prst="rect">
+            <a:avLst/>
+          </a:prstGeom>
+        </p:spPr>
+      </p:pic>
+      <p:sp>
+        <p:nvSpPr>
+          <p:cNvPr id="6" name="Text 3"/>
+          <p:cNvSpPr txBox="1"/>
+          <p:nvPr/>
+        </p:nvSpPr>
+        <p:spPr>
+          <a:xfrm>
+            <a:off x="8304352" y="91440"/>
+            <a:ext cx="3302127" cy="274320"/>
+          </a:xfrm>
+          <a:prstGeom prst="rect">
+            <a:avLst/>
+          </a:prstGeom>
+          <a:noFill/>
+          <a:ln/>
+        </p:spPr>
+        <p:txBody>
+          <a:bodyPr wrap="square" lIns="0" tIns="0" rIns="0" bIns="0" rtlCol="0" anchor="ctr"/>
+          <a:lstStyle/>
+          <a:p>
+            <a:pPr indent="0" marL="0">
+              <a:buNone/>
+            </a:pPr>
+            <a:r>
+              <a:rPr lang="en-US" sz="1100" b="1" dirty="0">
+                <a:solidFill>
+                  <a:srgbClr val="075985"/>
+                </a:solidFill>
+                <a:latin typeface="Calibri" pitchFamily="34" charset="0"/>
+                <a:ea typeface="Calibri" pitchFamily="34" charset="-122"/>
+                <a:cs typeface="Calibri" pitchFamily="34" charset="-120"/>
+              </a:rPr>
+              <a:t>DA COMPRENDERE OGGI</a:t>
+            </a:r>
+            <a:pPr indent="0" marL="0">
+              <a:buNone/>
+            </a:pPr>
+            <a:r>
+              <a:rPr lang="en-US" sz="1100" dirty="0">
+                <a:solidFill>
+                  <a:srgbClr val="075985"/>
+                </a:solidFill>
+                <a:latin typeface="Calibri" pitchFamily="34" charset="0"/>
+                <a:ea typeface="Calibri" pitchFamily="34" charset="-122"/>
+                <a:cs typeface="Calibri" pitchFamily="34" charset="-120"/>
+              </a:rPr>
+              <a:t> · gli array in memoria</a:t>
+            </a:r>
+            <a:endParaRPr lang="en-US" sz="1100" dirty="0"/>
+          </a:p>
+        </p:txBody>
+      </p:sp>
+      <p:pic>
+        <p:nvPicPr>
+          <p:cNvPr id="8" name="Image 1" descr="preencoded.png">    </p:cNvPr>
+          <p:cNvPicPr>
+            <a:picLocks noChangeAspect="1"/>
+          </p:cNvPicPr>
+          <p:nvPr/>
+        </p:nvPicPr>
+        <p:blipFill>
+          <a:blip r:embed="rId2"/>
+          <a:stretch>
+            <a:fillRect/>
+          </a:stretch>
+        </p:blipFill>
+        <p:spPr>
+          <a:xfrm>
             <a:off x="548640" y="1434168"/>
             <a:ext cx="6949440" cy="4721184"/>
           </a:xfrm>
@@ -9568,7 +10500,7 @@
       </p:pic>
       <p:sp>
         <p:nvSpPr>
-          <p:cNvPr id="5" name="Shape 1"/>
+          <p:cNvPr id="9" name="Shape 4"/>
           <p:cNvSpPr/>
           <p:nvPr/>
         </p:nvSpPr>
@@ -9593,7 +10525,7 @@
       </p:sp>
       <p:sp>
         <p:nvSpPr>
-          <p:cNvPr id="6" name="Text 2"/>
+          <p:cNvPr id="10" name="Text 5"/>
           <p:cNvSpPr txBox="1"/>
           <p:nvPr/>
         </p:nvSpPr>
@@ -9635,7 +10567,7 @@
       </p:sp>
       <p:sp>
         <p:nvSpPr>
-          <p:cNvPr id="7" name="Shape 3"/>
+          <p:cNvPr id="11" name="Shape 6"/>
           <p:cNvSpPr/>
           <p:nvPr/>
         </p:nvSpPr>
@@ -9660,7 +10592,7 @@
       </p:sp>
       <p:sp>
         <p:nvSpPr>
-          <p:cNvPr id="8" name="Text 4"/>
+          <p:cNvPr id="12" name="Text 7"/>
           <p:cNvSpPr txBox="1"/>
           <p:nvPr/>
         </p:nvSpPr>
@@ -9702,7 +10634,7 @@
       </p:sp>
       <p:sp>
         <p:nvSpPr>
-          <p:cNvPr id="9" name="Shape 5"/>
+          <p:cNvPr id="13" name="Shape 8"/>
           <p:cNvSpPr/>
           <p:nvPr/>
         </p:nvSpPr>
@@ -9727,7 +10659,7 @@
       </p:sp>
       <p:sp>
         <p:nvSpPr>
-          <p:cNvPr id="10" name="Text 6"/>
+          <p:cNvPr id="14" name="Text 9"/>
           <p:cNvSpPr txBox="1"/>
           <p:nvPr/>
         </p:nvSpPr>
@@ -9809,7 +10741,7 @@
       </p:sp>
       <p:sp>
         <p:nvSpPr>
-          <p:cNvPr id="11" name="Shape 7"/>
+          <p:cNvPr id="15" name="Shape 10"/>
           <p:cNvSpPr/>
           <p:nvPr/>
         </p:nvSpPr>
@@ -9834,7 +10766,7 @@
       </p:sp>
       <p:sp>
         <p:nvSpPr>
-          <p:cNvPr id="12" name="Text 8"/>
+          <p:cNvPr id="16" name="Text 11"/>
           <p:cNvSpPr txBox="1"/>
           <p:nvPr/>
         </p:nvSpPr>
@@ -9876,7 +10808,7 @@
       </p:sp>
       <p:sp>
         <p:nvSpPr>
-          <p:cNvPr id="13" name="Shape 9"/>
+          <p:cNvPr id="17" name="Shape 12"/>
           <p:cNvSpPr/>
           <p:nvPr/>
         </p:nvSpPr>
@@ -9901,7 +10833,7 @@
       </p:sp>
       <p:sp>
         <p:nvSpPr>
-          <p:cNvPr id="14" name="Text 10"/>
+          <p:cNvPr id="18" name="Text 13"/>
           <p:cNvSpPr txBox="1"/>
           <p:nvPr/>
         </p:nvSpPr>
@@ -10492,6 +11424,133 @@
               <a:t>di cella per frame: un passo quando la somma supera 256, e il resto non si butta via</a:t>
             </a:r>
             <a:endParaRPr lang="en-US" sz="1900" dirty="0"/>
+          </a:p>
+        </p:txBody>
+      </p:sp>
+      <p:sp>
+        <p:nvSpPr>
+          <p:cNvPr id="16" name="Shape 14"/>
+          <p:cNvSpPr/>
+          <p:nvPr/>
+        </p:nvSpPr>
+        <p:spPr>
+          <a:xfrm>
+            <a:off x="8182940" y="91440"/>
+            <a:ext cx="3460115" cy="274320"/>
+          </a:xfrm>
+          <a:prstGeom prst="rect">
+            <a:avLst/>
+          </a:prstGeom>
+          <a:solidFill>
+            <a:srgbClr val="E0F2FE"/>
+          </a:solidFill>
+          <a:ln w="12700">
+            <a:solidFill>
+              <a:srgbClr val="0369A1"/>
+            </a:solidFill>
+            <a:prstDash val="solid"/>
+          </a:ln>
+        </p:spPr>
+      </p:sp>
+      <p:sp>
+        <p:nvSpPr>
+          <p:cNvPr id="17" name="Shape 15"/>
+          <p:cNvSpPr/>
+          <p:nvPr/>
+        </p:nvSpPr>
+        <p:spPr>
+          <a:xfrm>
+            <a:off x="8182940" y="91440"/>
+            <a:ext cx="73152" cy="274320"/>
+          </a:xfrm>
+          <a:prstGeom prst="rect">
+            <a:avLst/>
+          </a:prstGeom>
+          <a:solidFill>
+            <a:srgbClr val="0369A1"/>
+          </a:solidFill>
+          <a:ln w="12700">
+            <a:solidFill>
+              <a:srgbClr val="0369A1"/>
+            </a:solidFill>
+            <a:prstDash val="solid"/>
+          </a:ln>
+        </p:spPr>
+      </p:sp>
+      <p:pic>
+        <p:nvPicPr>
+          <p:cNvPr id="18" name="Image 0" descr="preencoded.png">    </p:cNvPr>
+          <p:cNvPicPr>
+            <a:picLocks noChangeAspect="1"/>
+          </p:cNvPicPr>
+          <p:nvPr/>
+        </p:nvPicPr>
+        <p:blipFill>
+          <a:blip r:embed="rId1"/>
+          <a:stretch>
+            <a:fillRect/>
+          </a:stretch>
+        </p:blipFill>
+        <p:spPr>
+          <a:xfrm>
+            <a:off x="8310956" y="128016"/>
+            <a:ext cx="201168" cy="201168"/>
+          </a:xfrm>
+          <a:prstGeom prst="rect">
+            <a:avLst/>
+          </a:prstGeom>
+        </p:spPr>
+      </p:pic>
+      <p:sp>
+        <p:nvSpPr>
+          <p:cNvPr id="19" name="Text 16"/>
+          <p:cNvSpPr txBox="1"/>
+          <p:nvPr/>
+        </p:nvSpPr>
+        <p:spPr>
+          <a:xfrm>
+            <a:off x="8566988" y="91440"/>
+            <a:ext cx="3039491" cy="274320"/>
+          </a:xfrm>
+          <a:prstGeom prst="rect">
+            <a:avLst/>
+          </a:prstGeom>
+          <a:noFill/>
+          <a:ln/>
+        </p:spPr>
+        <p:txBody>
+          <a:bodyPr wrap="square" lIns="0" tIns="0" rIns="0" bIns="0" rtlCol="0" anchor="ctr"/>
+          <a:lstStyle/>
+          <a:p>
+            <a:pPr indent="0" marL="0">
+              <a:buNone/>
+            </a:pPr>
+            <a:r>
+              <a:rPr lang="en-US" sz="1100" b="1" dirty="0">
+                <a:solidFill>
+                  <a:srgbClr val="075985"/>
+                </a:solidFill>
+                <a:latin typeface="Calibri" pitchFamily="34" charset="0"/>
+                <a:ea typeface="Calibri" pitchFamily="34" charset="-122"/>
+                <a:cs typeface="Calibri" pitchFamily="34" charset="-120"/>
+              </a:rPr>
+              <a:t>DA COMPRENDERE OGGI</a:t>
+            </a:r>
+            <a:pPr indent="0" marL="0">
+              <a:buNone/>
+            </a:pPr>
+            <a:r>
+              <a:rPr lang="en-US" sz="1100" dirty="0">
+                <a:solidFill>
+                  <a:srgbClr val="075985"/>
+                </a:solidFill>
+                <a:latin typeface="Calibri" pitchFamily="34" charset="0"/>
+                <a:ea typeface="Calibri" pitchFamily="34" charset="-122"/>
+                <a:cs typeface="Calibri" pitchFamily="34" charset="-120"/>
+              </a:rPr>
+              <a:t> · la virgola fissa</a:t>
+            </a:r>
+            <a:endParaRPr lang="en-US" sz="1100" dirty="0"/>
           </a:p>
         </p:txBody>
       </p:sp>
@@ -13554,6 +14613,133 @@
       </p:sp>
       <p:sp>
         <p:nvSpPr>
+          <p:cNvPr id="5" name="Shape 2"/>
+          <p:cNvSpPr/>
+          <p:nvPr/>
+        </p:nvSpPr>
+        <p:spPr>
+          <a:xfrm>
+            <a:off x="8182940" y="91440"/>
+            <a:ext cx="3460115" cy="274320"/>
+          </a:xfrm>
+          <a:prstGeom prst="rect">
+            <a:avLst/>
+          </a:prstGeom>
+          <a:solidFill>
+            <a:srgbClr val="E0F2FE"/>
+          </a:solidFill>
+          <a:ln w="12700">
+            <a:solidFill>
+              <a:srgbClr val="0369A1"/>
+            </a:solidFill>
+            <a:prstDash val="solid"/>
+          </a:ln>
+        </p:spPr>
+      </p:sp>
+      <p:sp>
+        <p:nvSpPr>
+          <p:cNvPr id="6" name="Shape 3"/>
+          <p:cNvSpPr/>
+          <p:nvPr/>
+        </p:nvSpPr>
+        <p:spPr>
+          <a:xfrm>
+            <a:off x="8182940" y="91440"/>
+            <a:ext cx="73152" cy="274320"/>
+          </a:xfrm>
+          <a:prstGeom prst="rect">
+            <a:avLst/>
+          </a:prstGeom>
+          <a:solidFill>
+            <a:srgbClr val="0369A1"/>
+          </a:solidFill>
+          <a:ln w="12700">
+            <a:solidFill>
+              <a:srgbClr val="0369A1"/>
+            </a:solidFill>
+            <a:prstDash val="solid"/>
+          </a:ln>
+        </p:spPr>
+      </p:sp>
+      <p:pic>
+        <p:nvPicPr>
+          <p:cNvPr id="7" name="Image 0" descr="preencoded.png">    </p:cNvPr>
+          <p:cNvPicPr>
+            <a:picLocks noChangeAspect="1"/>
+          </p:cNvPicPr>
+          <p:nvPr/>
+        </p:nvPicPr>
+        <p:blipFill>
+          <a:blip r:embed="rId1"/>
+          <a:stretch>
+            <a:fillRect/>
+          </a:stretch>
+        </p:blipFill>
+        <p:spPr>
+          <a:xfrm>
+            <a:off x="8310956" y="128016"/>
+            <a:ext cx="201168" cy="201168"/>
+          </a:xfrm>
+          <a:prstGeom prst="rect">
+            <a:avLst/>
+          </a:prstGeom>
+        </p:spPr>
+      </p:pic>
+      <p:sp>
+        <p:nvSpPr>
+          <p:cNvPr id="8" name="Text 4"/>
+          <p:cNvSpPr txBox="1"/>
+          <p:nvPr/>
+        </p:nvSpPr>
+        <p:spPr>
+          <a:xfrm>
+            <a:off x="8566988" y="91440"/>
+            <a:ext cx="3039491" cy="274320"/>
+          </a:xfrm>
+          <a:prstGeom prst="rect">
+            <a:avLst/>
+          </a:prstGeom>
+          <a:noFill/>
+          <a:ln/>
+        </p:spPr>
+        <p:txBody>
+          <a:bodyPr wrap="square" lIns="0" tIns="0" rIns="0" bIns="0" rtlCol="0" anchor="ctr"/>
+          <a:lstStyle/>
+          <a:p>
+            <a:pPr indent="0" marL="0">
+              <a:buNone/>
+            </a:pPr>
+            <a:r>
+              <a:rPr lang="en-US" sz="1100" b="1" dirty="0">
+                <a:solidFill>
+                  <a:srgbClr val="075985"/>
+                </a:solidFill>
+                <a:latin typeface="Calibri" pitchFamily="34" charset="0"/>
+                <a:ea typeface="Calibri" pitchFamily="34" charset="-122"/>
+                <a:cs typeface="Calibri" pitchFamily="34" charset="-120"/>
+              </a:rPr>
+              <a:t>DA COMPRENDERE OGGI</a:t>
+            </a:r>
+            <a:pPr indent="0" marL="0">
+              <a:buNone/>
+            </a:pPr>
+            <a:r>
+              <a:rPr lang="en-US" sz="1100" dirty="0">
+                <a:solidFill>
+                  <a:srgbClr val="075985"/>
+                </a:solidFill>
+                <a:latin typeface="Calibri" pitchFamily="34" charset="0"/>
+                <a:ea typeface="Calibri" pitchFamily="34" charset="-122"/>
+                <a:cs typeface="Calibri" pitchFamily="34" charset="-120"/>
+              </a:rPr>
+              <a:t> · la virgola fissa</a:t>
+            </a:r>
+            <a:endParaRPr lang="en-US" sz="1100" dirty="0"/>
+          </a:p>
+        </p:txBody>
+      </p:sp>
+      <p:sp>
+        <p:nvSpPr>
           <p:cNvPr id="25" name="Slide Number Placeholder 0"/>
           <p:cNvSpPr>
             <a:spLocks noGrp="1"/>
@@ -14197,6 +15383,158 @@
               <a:t>Resume, e guardate i byte di step_q8 crescere di 40 (0x28) a ogni fermata</a:t>
             </a:r>
             <a:endParaRPr lang="en-US" sz="2200" dirty="0"/>
+          </a:p>
+        </p:txBody>
+      </p:sp>
+      <p:sp>
+        <p:nvSpPr>
+          <p:cNvPr id="15" name="Shape 13"/>
+          <p:cNvSpPr/>
+          <p:nvPr/>
+        </p:nvSpPr>
+        <p:spPr>
+          <a:xfrm>
+            <a:off x="7809941" y="91440"/>
+            <a:ext cx="3833114" cy="274320"/>
+          </a:xfrm>
+          <a:prstGeom prst="rect">
+            <a:avLst/>
+          </a:prstGeom>
+          <a:solidFill>
+            <a:srgbClr val="FEF3C7"/>
+          </a:solidFill>
+          <a:ln w="12700">
+            <a:solidFill>
+              <a:srgbClr val="B45309"/>
+            </a:solidFill>
+            <a:prstDash val="solid"/>
+          </a:ln>
+        </p:spPr>
+      </p:sp>
+      <p:sp>
+        <p:nvSpPr>
+          <p:cNvPr id="16" name="Shape 14"/>
+          <p:cNvSpPr/>
+          <p:nvPr/>
+        </p:nvSpPr>
+        <p:spPr>
+          <a:xfrm>
+            <a:off x="7809941" y="91440"/>
+            <a:ext cx="27432" cy="274320"/>
+          </a:xfrm>
+          <a:prstGeom prst="rect">
+            <a:avLst/>
+          </a:prstGeom>
+          <a:solidFill>
+            <a:srgbClr val="B45309"/>
+          </a:solidFill>
+          <a:ln w="12700">
+            <a:solidFill>
+              <a:srgbClr val="B45309"/>
+            </a:solidFill>
+            <a:prstDash val="solid"/>
+          </a:ln>
+        </p:spPr>
+      </p:sp>
+      <p:sp>
+        <p:nvSpPr>
+          <p:cNvPr id="17" name="Shape 15"/>
+          <p:cNvSpPr/>
+          <p:nvPr/>
+        </p:nvSpPr>
+        <p:spPr>
+          <a:xfrm>
+            <a:off x="7864805" y="91440"/>
+            <a:ext cx="27432" cy="274320"/>
+          </a:xfrm>
+          <a:prstGeom prst="rect">
+            <a:avLst/>
+          </a:prstGeom>
+          <a:solidFill>
+            <a:srgbClr val="B45309"/>
+          </a:solidFill>
+          <a:ln w="12700">
+            <a:solidFill>
+              <a:srgbClr val="B45309"/>
+            </a:solidFill>
+            <a:prstDash val="solid"/>
+          </a:ln>
+        </p:spPr>
+      </p:sp>
+      <p:pic>
+        <p:nvPicPr>
+          <p:cNvPr id="18" name="Image 0" descr="preencoded.png">    </p:cNvPr>
+          <p:cNvPicPr>
+            <a:picLocks noChangeAspect="1"/>
+          </p:cNvPicPr>
+          <p:nvPr/>
+        </p:nvPicPr>
+        <p:blipFill>
+          <a:blip r:embed="rId1"/>
+          <a:stretch>
+            <a:fillRect/>
+          </a:stretch>
+        </p:blipFill>
+        <p:spPr>
+          <a:xfrm>
+            <a:off x="7937957" y="128016"/>
+            <a:ext cx="201168" cy="201168"/>
+          </a:xfrm>
+          <a:prstGeom prst="rect">
+            <a:avLst/>
+          </a:prstGeom>
+        </p:spPr>
+      </p:pic>
+      <p:sp>
+        <p:nvSpPr>
+          <p:cNvPr id="19" name="Text 16"/>
+          <p:cNvSpPr txBox="1"/>
+          <p:nvPr/>
+        </p:nvSpPr>
+        <p:spPr>
+          <a:xfrm>
+            <a:off x="8193989" y="91440"/>
+            <a:ext cx="3412490" cy="274320"/>
+          </a:xfrm>
+          <a:prstGeom prst="rect">
+            <a:avLst/>
+          </a:prstGeom>
+          <a:noFill/>
+          <a:ln/>
+        </p:spPr>
+        <p:txBody>
+          <a:bodyPr wrap="square" lIns="0" tIns="0" rIns="0" bIns="0" rtlCol="0" anchor="ctr"/>
+          <a:lstStyle/>
+          <a:p>
+            <a:pPr indent="0" marL="0">
+              <a:buNone/>
+            </a:pPr>
+            <a:r>
+              <a:rPr lang="en-US" sz="1100" b="1" dirty="0">
+                <a:solidFill>
+                  <a:srgbClr val="92400E"/>
+                </a:solidFill>
+                <a:latin typeface="Calibri" pitchFamily="34" charset="0"/>
+                <a:ea typeface="Calibri" pitchFamily="34" charset="-122"/>
+                <a:cs typeface="Calibri" pitchFamily="34" charset="-120"/>
+              </a:rPr>
+              <a:t>DA UTILIZZARE OGGI</a:t>
+            </a:r>
+            <a:pPr indent="0" marL="0">
+              <a:buNone/>
+            </a:pPr>
+            <a:r>
+              <a:rPr lang="en-US" sz="1100" dirty="0">
+                <a:solidFill>
+                  <a:srgbClr val="92400E"/>
+                </a:solidFill>
+                <a:latin typeface="Calibri" pitchFamily="34" charset="0"/>
+                <a:ea typeface="Calibri" pitchFamily="34" charset="-122"/>
+                <a:cs typeface="Calibri" pitchFamily="34" charset="-120"/>
+              </a:rPr>
+              <a:t> · il debugger di PRG32-QT</a:t>
+            </a:r>
+            <a:endParaRPr lang="en-US" sz="1100" dirty="0"/>
           </a:p>
         </p:txBody>
       </p:sp>

--- a/it/slides/07-Architettura_dei_Calcolatori-Verm1_Parte_1.pptx
+++ b/it/slides/07-Architettura_dei_Calcolatori-Verm1_Parte_1.pptx
@@ -119,31 +119,31 @@
   <p:extLst>
     <p:ext uri="{521415D9-36F7-43E2-AB2F-B90AF26B5E84}">
       <p14:sectionLst xmlns:p14="http://schemas.microsoft.com/office/powerpoint/2010/main">
-        <p14:section name="Apertura" id="{d25e7dee-69b8-35b2-9e19-78ed494560f1}">
+        <p14:section name="Apertura" id="{7092b185-1ebe-54ed-dc0b-121c835a150b}">
           <p14:sldIdLst>
             <p14:sldId id="256"/>
             <p14:sldId id="257"/>
           </p14:sldIdLst>
         </p14:section>
-        <p14:section name="Il progetto" id="{bc9dccac-8f6f-bcf2-f005-6b0f9b2a88ae}">
+        <p14:section name="Il progetto" id="{fa0d05a9-595a-4e31-9d6d-656143d7e5ce}">
           <p14:sldIdLst>
             <p14:sldId id="258"/>
             <p14:sldId id="259"/>
             <p14:sldId id="260"/>
           </p14:sldIdLst>
         </p14:section>
-        <p14:section name="Passo 2: una griglia e una testa" id="{431da823-504f-42b5-a4d6-19fd67e9ab21}">
+        <p14:section name="Passo 2: una griglia e una testa" id="{a4ef9c55-84dc-5cf1-a64b-f2ec13d5499a}">
           <p14:sldIdLst>
             <p14:sldId id="261"/>
           </p14:sldIdLst>
         </p14:section>
-        <p14:section name="Passo 3: il movimento" id="{4ad7efeb-2266-06fb-6978-11152d362986}">
+        <p14:section name="Passo 3: il movimento" id="{6bff9c31-2daa-447d-c7ed-ecdd1633f459}">
           <p14:sldIdLst>
             <p14:sldId id="262"/>
             <p14:sldId id="263"/>
           </p14:sldIdLst>
         </p14:section>
-        <p14:section name="Passo 4: guardare dentro con PRG32-QT" id="{a50bdff8-60a5-de27-0ea7-4bd2cdf47b23}">
+        <p14:section name="Passo 4: guardare dentro con PRG32-QT" id="{c9a08ec4-af4a-eb43-dc88-dd9dd688dfb2}">
           <p14:sldIdLst>
             <p14:sldId id="264"/>
             <p14:sldId id="265"/>

--- a/it/slides/07-Architettura_dei_Calcolatori-Verm1_Parte_1.pptx
+++ b/it/slides/07-Architettura_dei_Calcolatori-Verm1_Parte_1.pptx
@@ -119,31 +119,31 @@
   <p:extLst>
     <p:ext uri="{521415D9-36F7-43E2-AB2F-B90AF26B5E84}">
       <p14:sectionLst xmlns:p14="http://schemas.microsoft.com/office/powerpoint/2010/main">
-        <p14:section name="Apertura" id="{7092b185-1ebe-54ed-dc0b-121c835a150b}">
+        <p14:section name="Apertura" id="{09099de1-83e7-e737-d71b-6ecab1fda310}">
           <p14:sldIdLst>
             <p14:sldId id="256"/>
             <p14:sldId id="257"/>
           </p14:sldIdLst>
         </p14:section>
-        <p14:section name="Il progetto" id="{fa0d05a9-595a-4e31-9d6d-656143d7e5ce}">
+        <p14:section name="Il progetto" id="{4d78eb3b-adb1-60dc-c6ac-fb5dc9987864}">
           <p14:sldIdLst>
             <p14:sldId id="258"/>
             <p14:sldId id="259"/>
             <p14:sldId id="260"/>
           </p14:sldIdLst>
         </p14:section>
-        <p14:section name="Passo 2: una griglia e una testa" id="{a4ef9c55-84dc-5cf1-a64b-f2ec13d5499a}">
+        <p14:section name="Passo 2: una griglia e una testa" id="{83a52b0e-0b3d-d131-40d4-75da24f6d7c3}">
           <p14:sldIdLst>
             <p14:sldId id="261"/>
           </p14:sldIdLst>
         </p14:section>
-        <p14:section name="Passo 3: il movimento" id="{6bff9c31-2daa-447d-c7ed-ecdd1633f459}">
+        <p14:section name="Passo 3: il movimento" id="{cb1e720b-be2e-27cc-6dfc-74254cd97f12}">
           <p14:sldIdLst>
             <p14:sldId id="262"/>
             <p14:sldId id="263"/>
           </p14:sldIdLst>
         </p14:section>
-        <p14:section name="Passo 4: guardare dentro con PRG32-QT" id="{c9a08ec4-af4a-eb43-dc88-dd9dd688dfb2}">
+        <p14:section name="Passo 4: guardare dentro con PRG32-QT" id="{37349431-e283-bdb2-b458-8726b5290806}">
           <p14:sldIdLst>
             <p14:sldId id="264"/>
             <p14:sldId id="265"/>
@@ -556,7 +556,7 @@
           <a:p>
             <a:r>
               <a:rPr lang="en-US" dirty="0"/>
-              <a:t>Qui comincia il progetto del corso. È un tutorial, non una lezione: scrivete un programma, passo per passo, e alla fine gira. Usa solo ciò che hanno insegnato le lezioni da 02 a 06: registri e memoria, colori e stringhe come numeri, confronti e scorrimenti, virgola fissa. L'immagine in copertina è ciò che avrete sullo schermo tra due ore: un titolo e un quadrato verde, la testa del verme, che attraversa lo schermo da solo. L'implementazione di riferimento è un contributo di Giuseppe Coviello.
+              <a:t>Qui comincia il progetto del corso. È un tutorial più che una lezione: si scrive un programma passo per passo, e alla fine gira. Attinge esclusivamente alle Lezioni dalla 02 alla 06: registri e memoria, colori e stringhe come numeri, confronti e scorrimenti, virgola fissa. La copertina mostra lo stato dello schermo tra due ore: un titolo e un quadrato verde, la testa del verme, che attraversa lo schermo da solo. Lo scopo della sessione è l'integrazione: concetti studiati separatamente devono ora cooperare in un solo programma. L'implementazione di riferimento è un contributo di Giuseppe Coviello.
 Stato di apprendimento: DA COMPRENDERE OGGI, alla fine di questa lezione lo spiegate, lo seguite passo passo e lo applicate da soli; DA UTILIZZARE OGGI, oggi seguite e usate la ricetta; come funziona dentro si spiega più avanti, o non fa parte del corso; DA COMPRENDERE PIÙ AVANTI, riconoscete il nome e lo scopo; lo spiega una lezione successiva. Una slide senza etichetta è contesto: una storia, un esempio, una domanda, un esercizio.
 Stato di apprendimento di questa lezione. DA COMPRENDERE OGGI: il progetto Verm1; contratto init/update/draw; un colore è un numero; gli array in memoria; .text, .rodata, .data; indirizzo, valore, load, store; perché si salva ra; shift come moltiplicazione; la virgola fissa; le pseudo-istruzioni; l'ordine little-endian. DA UTILIZZARE OGGI: gli strumenti di PRG32, il debugger di PRG32-QT (si usa, non si studia, in questo corso). DA COMPRENDERE PIÙ AVANTI: formati delle istruzioni (Lezione 19). Una slide senza etichetta è contesto: una storia, un esempio, una domanda, un esercizio.
 Per il docente: Primo tutorial del progetto. Usa solo le Lezioni da 02 a 06: registri, load e store, chiamate (02), stringhe e colori (04), interi, confronti e ritorno a capo (05), virgola fissa (06), e un po' di storia (03). Gli studenti scrivono da sé il programma; il file di riferimento è verm1/verm1_part1.S. Tutto ciò che compare sulle slide di codice è letto da quel file, che viene compilato ed eseguito automaticamente.</a:t>
@@ -647,7 +647,7 @@
           <a:p>
             <a:r>
               <a:rPr lang="en-US" dirty="0"/>
-              <a:t>La vista della memoria mostra 128 byte in esadecimale a partire dall'indirizzo scritto. Una parola occupa quattro byte, il meno significativo per primo: quando step_q8 vale 240 si legge F0 00 00 00. È l'ordine little-endian della Lezione 04, visto dal vivo. Le variabili stanno in memoria nell'ordine del file: head_x, head_y, step_q8, quindi la colonna della testa sta otto byte prima della frazione. Il debugger osserva soltanto: per cambiare il programma si modifica, si compila e si esegue.
+              <a:t>La vista della memoria mostra 128 byte in esadecimale a partire dall'indirizzo inserito. Una parola occupa quattro byte, il meno significativo per primo: quando step_q8 vale 240 la vista mostra F0 00 00 00. È l'ordine little-endian della Lezione 04, ora osservato direttamente. Le variabili compaiono in memoria nell'ordine in cui il file le dichiara, head_x, head_y, step_q8, quindi la colonna della testa sta otto byte prima dell'accumulatore. Il debugger osserva soltanto; per cambiare il programma si modifica, si compila e si esegue di nuovo.
 DA COMPRENDERE OGGI: l'ordine little-endian.
 Per il docente: Ordine dei byte: Lezione 04. Nel file l'ordine è head_x, head_y, step_q8, quattro byte ciascuna: se step_q8 sta all'indirizzo A, head_x sta in A - 8.</a:t>
             </a:r>
@@ -737,8 +737,8 @@
           <a:p>
             <a:r>
               <a:rPr lang="en-US" dirty="0"/>
-              <a:t>64 su 256 è un quarto di cella per frame. Quanti quarti fanno una cella intera? I due numeri grandi sono distrattori: 64 è la velocità stessa, e 256 è la dimensione di una cella nelle unità del timer.
-Applicate le due formule della griglia: x è la colonna per 8; y è la riga per 8, più gli 8 pixel della riga del titolo. L'opzione che dimentica la riga del titolo è l'errore più comune.
+              <a:t>Per la prima domanda: 64 su 256 è un quarto di cella per frame, e la domanda è quanti quarti fanno una cella intera. I due numeri grandi sono distrattori: 64 è la velocità stessa, e 256 è la dimensione di una cella nelle unità dell'accumulatore.
+Per la seconda valgono le due formule della griglia: x è la colonna per 8; y è la riga per 8 più gli 8 pixel della riga del titolo. L'opzione che dimentica la riga del titolo rappresenta l'errore più comune.
 Per il docente: 1. Risposta: B. 64/256 = 1/4 di cella per frame: una cella intera ogni 4 frame.
 2. Risposta: C. x = 10 x 8 = 80; y = 3 x 8 + 8 = 32.</a:t>
             </a:r>
@@ -828,7 +828,7 @@
           <a:p>
             <a:r>
               <a:rPr lang="en-US" dirty="0"/>
-              <a:t>Non è questione di lunghezza. Una chiamata scrive in ra l'indirizzo di ritorno, quindi una funzione che fa chiamate deve mettere al sicuro sullo stack il proprio ra. verm1_update è una foglia: non chiama nulla, e quando arriva a ret il registro ra contiene ancora l'indirizzo giusto.
+              <a:t>La risposta non dipende dalla lunghezza della funzione. Una chiamata scrive l'indirizzo di ritorno in ra, quindi una funzione che fa chiamate deve preservare il proprio ra sullo stack. verm1_update è una funzione foglia: non chiama nulla, quindi ra contiene ancora l'indirizzo corretto quando si raggiunge ret, e non serve alcuno stack frame.
 Per il docente: Risposta: B. Una chiamata scrive in ra l'indirizzo di ritorno. Una funzione che fa chiamate deve mettere al sicuro sullo stack il proprio ra; a una funzione foglia non serve.</a:t>
             </a:r>
             <a:endParaRPr lang="en-US" dirty="0"/>
@@ -917,7 +917,7 @@
           <a:p>
             <a:r>
               <a:rPr lang="en-US" dirty="0"/>
-              <a:t>Dove siete. Avete una cartuccia che gira e che capite riga per riga. Ha già la forma di ogni gioco: uno stato in memoria, una regola che lo cambia a ogni frame, e una funzione che lo disegna. Manca il giocatore: la testa va dove vuole lei. Le prossime quattro lezioni danno gli strumenti per leggere il joystick e per decidere, bit, maschere e tabelle, e la Parte 2 li usa per aggiungere la guida, il cibo e un punteggio.
+              <a:t>La situazione attuale. Lo studente ha una cartuccia che gira e che comprende riga per riga. Mostra già la struttura comune a ogni gioco: uno stato in memoria, una regola che lo trasforma a ogni frame e una funzione che lo rappresenta. Manca il giocatore: la testa va dove le pare. Le prossime quattro lezioni forniscono i mezzi per leggere il joystick e prendere decisioni, cioè bit, maschere, regole booleane e tabelle, e la Parte 2 li applica per aggiungere guida, cibo e punteggio.
 Stato di apprendimento, riepilogo. DA COMPRENDERE OGGI: il progetto Verm1; contratto init/update/draw; un colore è un numero; gli array in memoria; .text, .rodata, .data; indirizzo, valore, load, store; perché si salva ra; shift come moltiplicazione; la virgola fissa; le pseudo-istruzioni; l'ordine little-endian. DA UTILIZZARE OGGI: gli strumenti di PRG32, il debugger di PRG32-QT (si usa, non si studia, in questo corso). DA COMPRENDERE PIÙ AVANTI: formati delle istruzioni (Lezione 19). Una slide senza etichetta è contesto: una storia, un esempio, una domanda, un esercizio.
 Per il docente: File di riferimento di questa parte: verm1/verm1_part1.S (78 righe). Se all'inizio della Parte 2 il programma di uno studente non funziona, si parte da questo file.</a:t>
             </a:r>
@@ -1007,7 +1007,7 @@
           <a:p>
             <a:r>
               <a:rPr lang="en-US" dirty="0"/>
-              <a:t>Cinque risultati. Una cartuccia vostra, compilata da un solo file scritto da voi. Un titolo, una griglia di 40 per 24 celle e la testa disegnata in una di esse. La testa che si muove da sola, una cella alla volta, a una velocità fissata in virgola fissa. Un mondo senza bordi, in cui la testa che esce a destra rientra da sinistra. E un'abitudine, che conta più del programma: il ciclo di lavoro modificare, compilare, eseguire, guardare, con il debugger come strumento normale.</a:t>
+              <a:t>Cinque risultati. Una cartuccia tutta dello studente, compilata da un solo file scritto a mano. Un titolo, una griglia di 40 per 24 celle e la testa disegnata in una di esse. La testa che si muove da sola, una cella alla volta, a una velocità espressa in virgola fissa. Un mondo senza bordi, in cui la testa che esce a destra rientra da sinistra. E, più importante del programma stesso, un metodo: il ciclo di lavoro modifica, compila, esegui e osserva, con il debugger come strumento ordinario e non come ultima risorsa.</a:t>
             </a:r>
             <a:endParaRPr lang="en-US" dirty="0"/>
           </a:p>
@@ -1095,7 +1095,7 @@
           <a:p>
             <a:r>
               <a:rPr lang="en-US" dirty="0"/>
-              <a:t>Verm1, si legge "vermone", è un omaggio a Snake: un verme che si muove su una griglia, mangia, cresce e non deve mordersi. L'idea risale all'arcade Blockade del 1976 ed è diventata celebre sui telefoni Nokia del 1997. È stato scelto perché è abbastanza piccolo da essere scritto da zero in assembly eppure richiede ogni argomento del corso. Scrivete ogni riga voi; sotto non c'è alcun motore. L'immagine a destra è il punto a cui arriverete nella Parte 4.
+              <a:t>Verm1, che si legge "vermone", è un omaggio a Snake: un verme si muove su una griglia, mangia, cresce e non deve urtare sé stesso. L'idea risale al gioco da sala Blockade del 1976 e raggiunse grande popolarità sui telefoni Nokia del 1997. È stato scelto perché è abbastanza piccolo da essere scritto da zero in assembly e richiede tuttavia ogni argomento del corso. Ogni riga è scritta dallo studente, senza alcun motore sottostante. L'immagine a destra mostra la meta, raggiunta nella Parte 4.
 DA COMPRENDERE OGGI: il progetto Verm1.
 Per il docente: Snake per il Nokia 6110 fu scritto da Taneli Armanto. Verm1 è un omaggio, non una copia: il nome, le regole di dettaglio e l'aspetto sono nostri. L'implementazione di riferimento seguita dai tutorial è un contributo di Giuseppe Coviello.</a:t>
             </a:r>
@@ -1185,7 +1185,7 @@
           <a:p>
             <a:r>
               <a:rPr lang="en-US" dirty="0"/>
-              <a:t>Il piano del progetto. Ogni riga è un tutorial, ciò che vi si aggiunge e le lezioni che usa. Parte 1, oggi: una griglia, una testa, il movimento automatico. Parte 2, Lezione 12: la guida, il cibo, un punteggio. Parte 3, Lezione 17: un corpo che cresce e le collisioni. Parte 4, Lezione 22: il gioco finito. La Lezione 23 prepara il bundle per lo Store. Una regola vale per ogni parte: mai cominciare con un programma che non gira; se il vostro è rotto, partite dal file di riferimento.
+              <a:t>Il piano del progetto. Ogni riga è un tutorial, ciò che aggiunge e le lezioni su cui si basa. Parte 1, oggi: una griglia, una testa, il movimento autonomo. Parte 2, Lezione 12: guida, cibo e punteggio. Parte 3, Lezione 17: un corpo che cresce e le collisioni. Parte 4, Lezione 22: il gioco finito. La Lezione 23 prepara il bundle per lo Store. Una regola vale per ogni parte: non si comincia mai da un programma che non gira. Uno studente il cui file è rotto riparte dal file di riferimento, così che ogni sessione si costruisca su una base funzionante.
 DA COMPRENDERE OGGI: il progetto Verm1.
 Per il docente: Ogni parte finisce con un programma che gira. Non cominciare mai una parte con un programma che non gira: se il proprio è rotto, si parte dal file di riferimento della parte precedente.</a:t>
             </a:r>
@@ -1275,7 +1275,7 @@
           <a:p>
             <a:r>
               <a:rPr lang="en-US" dirty="0"/>
-              <a:t>Nel programma di oggi non c'è nulla di nuovo: ogni idea viene da una lezione. I registri, la, lw, sw, le chiamate e il frame di stack vengono dalla Lezione 02. I colori come numeri RGB565 e le stringhe terminate da zero vengono dalla Lezione 04. Gli scorrimenti usati come moltiplicazioni, i confronti e il ritorno a capo vengono dalla Lezione 05. La virgola fissa, una frazione tenuta come intero scalato, viene dalla Lezione 06, e diventa la velocità del verme. Tenete aperta questa tabella: quando una riga di codice vi lascia perplessi, la terza colonna dice quale lezione rileggere.</a:t>
+              <a:t>Nulla nel programma di oggi è nuovo: ogni idea è riconducibile a una lezione. Registri, la, lw, sw, chiamate di procedura e stack frame vengono dalla Lezione 02. Colori come numeri RGB565 e stringhe terminate da zero vengono dalla Lezione 04. Scorrimenti come moltiplicazioni, confronti e giro attorno vengono dalla Lezione 05. La virgola fissa, una frazione tenuta come intero scalato, viene dalla Lezione 06 e diventa la velocità del verme. La tabella va tenuta aperta per tutta la sessione: quando una riga di codice lascia perplessi, la sua terza colonna indica quale lezione rileggere.</a:t>
             </a:r>
             <a:endParaRPr lang="en-US" dirty="0"/>
           </a:p>
@@ -1363,7 +1363,7 @@
           <a:p>
             <a:r>
               <a:rPr lang="en-US" dirty="0"/>
-              <a:t>Il verme non vive nei pixel: vive nelle celle. Una posizione è una colonna da 0 a 39 e una riga da 0 a 23, e la testa parte dalla colonna 5 della riga 12, la cella chiara nel disegno. Per disegnare una cella le sue coordinate si trasformano in pixel: x è la colonna per 8, uno scorrimento a sinistra di 3; y è la riga per 8 più 8, perché prima viene la riga del titolo. Pensare in celle rende semplici tutte le regole successive: muoversi è sommare 1, e due cose si scontrano quando le loro celle sono uguali.
+              <a:t>Il verme abita celle, non pixel. Una posizione è una colonna da 0 a 39 e una riga da 0 a 23, e la testa parte dalla colonna 5 della riga 12, la cella evidenziata. Per disegnare una cella, le sue coordinate si trasformano in pixel: x è la colonna per 8, uno scorrimento a sinistra di 3; y è la riga per 8 più 8, per lasciare posto alla riga del titolo. Questo cambio di sistema di coordinate è una decisione di modellazione con benefici duraturi: in coordinate di cella ogni regola successiva è semplice, perché muoversi è sommare 1 e due oggetti si scontrano esattamente quando le loro celle sono uguali.
 DA COMPRENDERE OGGI: gli array in memoria.
 Per il docente: Disegnare la griglia alla lavagna e chiedere le coordinate in pixel di alcune celle: (0,0) sta in (0,8); (39,23) sta in (312,192).</a:t>
             </a:r>
@@ -1453,7 +1453,7 @@
           <a:p>
             <a:r>
               <a:rPr lang="en-US" dirty="0"/>
-              <a:t>update viene eseguita circa trenta volte al secondo. A una cella per frame la testa attraverserebbe le quaranta colonne in poco più di un secondo. Vogliamo una frazione di cella per frame. Teniamo quindi una frazione in unità di 1/256 di cella, le sommiamo la velocità a ogni frame, e facciamo un passo ogni volta che si è accumulata una cella intera, 256. Con SPEED_Q8 uguale a 40 la testa avanza di 40/256 di cella per frame: un passo ogni sei frame circa. Il resto si conserva, quindi in media la velocità è esatta.
+              <a:t>update gira circa trenta volte al secondo. A una cella per frame la testa attraverserebbe le quaranta colonne in poco più di un secondo, il che è ingiocabile. Serve una frazione di cella per frame. La soluzione tiene un accumulatore in unità di 1/256 di cella, vi somma la velocità a ogni frame e avanza di una cella ogni volta che si è accumulata una cella intera, 256 unità. Con SPEED_Q8 uguale a 40 la testa avanza di 40/256 di cella per frame, un passo circa ogni sei frame. Poiché il resto viene conservato e non scartato, la velocità media è esatta.
 DA COMPRENDERE OGGI: la virgola fissa.
 Per il docente: È la palla della Lezione 06, trasformata in un timer. Il resto si conserva, quindi la velocità media è esatta: 256 frame danno esattamente 40 passi.</a:t>
             </a:r>
@@ -1543,7 +1543,7 @@
           <a:p>
             <a:r>
               <a:rPr lang="en-US" dirty="0"/>
-              <a:t>Una traccia a mano, l'esercizio più utile del tutorial. A ogni frame si somma 40 alla frazione. Nei frame da 1 a 6 la somma resta sotto 256 e la testa non si muove. Al frame 7 arriva a 280: si è accumulata una cella intera, si sottrae 256, resta 24, e la testa passa dalla colonna 5 alla colonna 6. I passi arrivano ogni sei o sette frame, e il resto porta con sé la differenza, come il giorno in più di un anno bisestile. Compilate voi i frame da 8 a 12.
+              <a:t>Un tracciamento a mano, l'esercizio più istruttivo del tutorial. A ogni frame si somma 40 all'accumulatore. Nei frame da 1 a 6 la somma resta sotto 256 e la testa non si muove. Al frame 7 arriva a 280: si è accumulata una cella intera, si sottrae 256, resta 24, e la testa passa dalla colonna 5 alla colonna 6. I passi avvengono quindi ogni sei o sette frame, e il resto assorbe la differenza, un po' come il giorno in più di un anno bisestile riconcilia il calendario con l'anno solare. I frame da 8 a 12 sono lasciati da completare.
 DA COMPRENDERE OGGI: la virgola fissa.
 Per il docente: Dopo 64 frame la somma è 64 x 40 = 2560 = 10 x 256: dieci passi, testa nella colonna 15, esattamente ciò che mostra la schermata. Chiedere agli studenti di compilare i frame da 8 a 12.</a:t>
             </a:r>
@@ -1633,7 +1633,7 @@
           <a:p>
             <a:r>
               <a:rPr lang="en-US" dirty="0"/>
-              <a:t>Una procedura precisa. Attivate la modalità debug in Settings ed eseguite la cartuccia. Premete Update: il listato mostra verm1_update. Cliccate nel margine accanto alla sua prima istruzione per mettere un breakpoint: il programma si ferma lì al frame successivo. Ora avanzate, un'istruzione alla volta, e osservate i registri. Dopo le due istruzioni che realizzano la, t0 contiene un indirizzo: scrivetelo nel campo Memory e vedrete i byte di step_q8. Ogni Resume esegue un frame, e il valore cresce di 40, 0x28.
+              <a:t>Una procedura di debug precisa. Si abilita la modalità debug in Settings e si esegue la cartuccia. Update mostra verm1_update nel listato; un clic nel margine accanto alla sua prima istruzione imposta un breakpoint, su cui il programma si ferma al frame successivo. Avanzando un'istruzione alla volta, si osservano i registri. Dopo le due istruzioni in cui si espande la, t0 contiene un indirizzo; inserendolo nel campo Memory si vedono i byte di step_q8. Ogni Resume esegue un frame, e il valore cresce di 40, cioè 0x28.
 DA UTILIZZARE OGGI: il debugger di PRG32-QT (si usa, non si studia, in questo corso).
 Per il docente: Dalla guida al debug di PRG32-QT: pausa, ripresa, passo; viste Init / Update / Draw / PC; breakpoint nel margine; una vista di 128 byte di memoria. Resume ignora una volta il breakpoint corrente, quindi ogni pressione di Resume esegue un frame intero.</a:t>
             </a:r>
@@ -2752,7 +2752,7 @@
                 <a:ea typeface="Calibri" pitchFamily="34" charset="-122"/>
                 <a:cs typeface="Calibri" pitchFamily="34" charset="-120"/>
               </a:rPr>
-              <a:t>07-Architettura_dei_Calcolatori-Verm1_Parte_1-Codice.pptx</a:t>
+              <a:t>07-Architettura_dei_Calcolatori-Verm1_Parte_1-Lab.pptx</a:t>
             </a:r>
             <a:endParaRPr lang="en-US" sz="1300" dirty="0"/>
           </a:p>

--- a/it/slides/07-Architettura_dei_Calcolatori-Verm1_Parte_1.pptx
+++ b/it/slides/07-Architettura_dei_Calcolatori-Verm1_Parte_1.pptx
@@ -119,31 +119,31 @@
   <p:extLst>
     <p:ext uri="{521415D9-36F7-43E2-AB2F-B90AF26B5E84}">
       <p14:sectionLst xmlns:p14="http://schemas.microsoft.com/office/powerpoint/2010/main">
-        <p14:section name="Apertura" id="{09099de1-83e7-e737-d71b-6ecab1fda310}">
+        <p14:section name="Apertura" id="{a17c3105-9ce0-16c0-0007-770096fab054}">
           <p14:sldIdLst>
             <p14:sldId id="256"/>
             <p14:sldId id="257"/>
           </p14:sldIdLst>
         </p14:section>
-        <p14:section name="Il progetto" id="{4d78eb3b-adb1-60dc-c6ac-fb5dc9987864}">
+        <p14:section name="Il progetto" id="{4c74fcb8-f34e-41f5-5907-4d63cfe35a35}">
           <p14:sldIdLst>
             <p14:sldId id="258"/>
             <p14:sldId id="259"/>
             <p14:sldId id="260"/>
           </p14:sldIdLst>
         </p14:section>
-        <p14:section name="Passo 2: una griglia e una testa" id="{83a52b0e-0b3d-d131-40d4-75da24f6d7c3}">
+        <p14:section name="Passo 2: una griglia e una testa" id="{a31bf825-d2a2-a692-4bd2-01e2f97d1b4a}">
           <p14:sldIdLst>
             <p14:sldId id="261"/>
           </p14:sldIdLst>
         </p14:section>
-        <p14:section name="Passo 3: il movimento" id="{cb1e720b-be2e-27cc-6dfc-74254cd97f12}">
+        <p14:section name="Passo 3: il movimento" id="{3deffe28-9263-3a8c-822a-a7f6eaba93b2}">
           <p14:sldIdLst>
             <p14:sldId id="262"/>
             <p14:sldId id="263"/>
           </p14:sldIdLst>
         </p14:section>
-        <p14:section name="Passo 4: guardare dentro con PRG32-QT" id="{37349431-e283-bdb2-b458-8726b5290806}">
+        <p14:section name="Passo 4: guardare dentro con PRG32-QT" id="{c521963c-abe4-e205-2cfc-96d8b28e5b2d}">
           <p14:sldIdLst>
             <p14:sldId id="264"/>
             <p14:sldId id="265"/>

--- a/it/slides/07-Architettura_dei_Calcolatori-Verm1_Parte_1.pptx
+++ b/it/slides/07-Architettura_dei_Calcolatori-Verm1_Parte_1.pptx
@@ -119,31 +119,31 @@
   <p:extLst>
     <p:ext uri="{521415D9-36F7-43E2-AB2F-B90AF26B5E84}">
       <p14:sectionLst xmlns:p14="http://schemas.microsoft.com/office/powerpoint/2010/main">
-        <p14:section name="Apertura" id="{a17c3105-9ce0-16c0-0007-770096fab054}">
+        <p14:section name="Apertura" id="{a4a1133c-f485-69a6-45a4-0c6249964b2a}">
           <p14:sldIdLst>
             <p14:sldId id="256"/>
             <p14:sldId id="257"/>
           </p14:sldIdLst>
         </p14:section>
-        <p14:section name="Il progetto" id="{4c74fcb8-f34e-41f5-5907-4d63cfe35a35}">
+        <p14:section name="Il progetto" id="{70144a62-f2dc-b628-4074-dee5ea71a14c}">
           <p14:sldIdLst>
             <p14:sldId id="258"/>
             <p14:sldId id="259"/>
             <p14:sldId id="260"/>
           </p14:sldIdLst>
         </p14:section>
-        <p14:section name="Passo 2: una griglia e una testa" id="{a31bf825-d2a2-a692-4bd2-01e2f97d1b4a}">
+        <p14:section name="Passo 2: una griglia e una testa" id="{647e5608-b7fc-a53d-b89e-176cb6f744ec}">
           <p14:sldIdLst>
             <p14:sldId id="261"/>
           </p14:sldIdLst>
         </p14:section>
-        <p14:section name="Passo 3: il movimento" id="{3deffe28-9263-3a8c-822a-a7f6eaba93b2}">
+        <p14:section name="Passo 3: il movimento" id="{1d417aca-ede1-cd56-8dda-81e4731134dd}">
           <p14:sldIdLst>
             <p14:sldId id="262"/>
             <p14:sldId id="263"/>
           </p14:sldIdLst>
         </p14:section>
-        <p14:section name="Passo 4: guardare dentro con PRG32-QT" id="{c521963c-abe4-e205-2cfc-96d8b28e5b2d}">
+        <p14:section name="Passo 4: guardare dentro con PRG32-QT" id="{a0d909f1-2667-56ef-c6a1-d2fdb9fe336a}">
           <p14:sldIdLst>
             <p14:sldId id="264"/>
             <p14:sldId id="265"/>
@@ -559,6 +559,8 @@
               <a:t>Qui comincia il progetto del corso. È un tutorial più che una lezione: si scrive un programma passo per passo, e alla fine gira. Attinge esclusivamente alle Lezioni dalla 02 alla 06: registri e memoria, colori e stringhe come numeri, confronti e scorrimenti, virgola fissa. La copertina mostra lo stato dello schermo tra due ore: un titolo e un quadrato verde, la testa del verme, che attraversa lo schermo da solo. Lo scopo della sessione è l'integrazione: concetti studiati separatamente devono ora cooperare in un solo programma. L'implementazione di riferimento è un contributo di Giuseppe Coviello.
 Stato di apprendimento: DA COMPRENDERE OGGI, alla fine di questa lezione lo spiegate, lo seguite passo passo e lo applicate da soli; DA UTILIZZARE OGGI, oggi seguite e usate la ricetta; come funziona dentro si spiega più avanti, o non fa parte del corso; DA COMPRENDERE PIÙ AVANTI, riconoscete il nome e lo scopo; lo spiega una lezione successiva. Una slide senza etichetta è contesto: una storia, un esempio, una domanda, un esercizio.
 Stato di apprendimento di questa lezione. DA COMPRENDERE OGGI: il progetto Verm1; contratto init/update/draw; un colore è un numero; gli array in memoria; .text, .rodata, .data; indirizzo, valore, load, store; perché si salva ra; shift come moltiplicazione; la virgola fissa; le pseudo-istruzioni; l'ordine little-endian. DA UTILIZZARE OGGI: gli strumenti di PRG32, il debugger di PRG32-QT (si usa, non si studia, in questo corso). DA COMPRENDERE PIÙ AVANTI: formati delle istruzioni (Lezione 19). Una slide senza etichetta è contesto: una storia, un esempio, una domanda, un esercizio.
+Percorso. I risultati di oggi: (1) costruire una cartuccia da un file vuoto: una griglia, un titolo e una testa che si muove; (2) mettere costanti e variabili nella sezione giusta, .rodata o .data; (3) controllare una velocità con un accumulatore in virgola fissa. Si appoggia su: contratto init/update/draw (Lezione 02); un colore è un numero (Lezione 04); gli array in memoria (Lezione 04); indirizzo, valore, load, store (Lezione 02); perché si salva ra (Lezione 02). Prossimo passo: Lezione 08, Elementi di algebra di Boole.
+Ponte. Nella Lezione 02 il passo 2 salvava ra sullo stack prima delle sue chiamate, e lw t1, 0(t0) leggeva una parola all'indirizzo in t0. Oggi verm1_draw salva ra e verm1_update no, e ogni variabile di Verm1 si legge con la e lw. La Lezione 18 spiega lo stack e la convenzione di chiamata; la Lezione 19 nomina i modi di indirizzamento. Richiamo: Perché verm1_draw salva ra mentre verm1_update no?
 Per il docente: Primo tutorial del progetto. Usa solo le Lezioni da 02 a 06: registri, load e store, chiamate (02), stringhe e colori (04), interi, confronti e ritorno a capo (05), virgola fissa (06), e un po' di storia (03). Gli studenti scrivono da sé il programma; il file di riferimento è verm1/verm1_part1.S. Tutto ciò che compare sulle slide di codice è letto da quel file, che viene compilato ed eseguito automaticamente.</a:t>
             </a:r>
             <a:endParaRPr lang="en-US" dirty="0"/>
@@ -918,7 +920,7 @@
             <a:r>
               <a:rPr lang="en-US" dirty="0"/>
               <a:t>La situazione attuale. Lo studente ha una cartuccia che gira e che comprende riga per riga. Mostra già la struttura comune a ogni gioco: uno stato in memoria, una regola che lo trasforma a ogni frame e una funzione che lo rappresenta. Manca il giocatore: la testa va dove le pare. Le prossime quattro lezioni forniscono i mezzi per leggere il joystick e prendere decisioni, cioè bit, maschere, regole booleane e tabelle, e la Parte 2 li applica per aggiungere guida, cibo e punteggio.
-Stato di apprendimento, riepilogo. DA COMPRENDERE OGGI: il progetto Verm1; contratto init/update/draw; un colore è un numero; gli array in memoria; .text, .rodata, .data; indirizzo, valore, load, store; perché si salva ra; shift come moltiplicazione; la virgola fissa; le pseudo-istruzioni; l'ordine little-endian. DA UTILIZZARE OGGI: gli strumenti di PRG32, il debugger di PRG32-QT (si usa, non si studia, in questo corso). DA COMPRENDERE PIÙ AVANTI: formati delle istruzioni (Lezione 19). Una slide senza etichetta è contesto: una storia, un esempio, una domanda, un esercizio.
+Stato di apprendimento, riepilogo. DA COMPRENDERE OGGI: il progetto Verm1; contratto init/update/draw; un colore è un numero; gli array in memoria; .text, .rodata, .data; indirizzo, valore, load, store; perché si salva ra; shift come moltiplicazione; la virgola fissa; le pseudo-istruzioni; l'ordine little-endian. DA UTILIZZARE OGGI: gli strumenti di PRG32, il debugger di PRG32-QT (si usa, non si studia, in questo corso). DA COMPRENDERE PIÙ AVANTI: formati delle istruzioni (Lezione 19). Una slide senza etichetta è contesto: una storia, un esempio, una domanda, un esercizio. Il filo della lezione: I numeri sono diventati posizioni, colori e una velocità: l'intero blocco sull'informazione, in un gioco che gira. Prossimo passo: la logica che permetterà al giocatore di guidarlo. Biglietto d'uscita (da due a quattro minuti, da soli, su carta): 1. Verm1 dichiara title: .asciz "VERM1" e head_x: .word 5. In quale sezione va ciascuno, e perché head_x non deve stare in .rodata? 2. step_q8 cresce di SPEED_Q8 a ogni frame, e la testa si sposta di una cella ogni volta che arriva a 256. Con SPEED_Q8 = 64, quanti frame tra due passi? Con 128? Prevedete, poi eseguite.
 Per il docente: File di riferimento di questa parte: verm1/verm1_part1.S (78 righe). Se all'inizio della Parte 2 il programma di uno studente non funziona, si parte da questo file.</a:t>
             </a:r>
             <a:endParaRPr lang="en-US" dirty="0"/>
